--- a/S1-CL1-Cloud-Design-Build/delivery/topic_11/Topic_11_Slides.pptx
+++ b/S1-CL1-Cloud-Design-Build/delivery/topic_11/Topic_11_Slides.pptx
@@ -3407,7 +3407,7 @@
           <a:noFill/>
         </p:spPr>
         <p:txBody>
-          <a:bodyPr wrap="square" anchor="t" lIns="0" rIns="0" tIns="0" bIns="0">
+          <a:bodyPr wrap="square" anchor="ctr" lIns="0" rIns="0" tIns="0" bIns="0">
             <a:spAutoFit/>
           </a:bodyPr>
           <a:lstStyle/>
@@ -3424,7 +3424,7 @@
               </a:spcAft>
             </a:pPr>
             <a:r>
-              <a:rPr sz="1800" b="1" i="0">
+              <a:rPr sz="2400" b="1" i="0">
                 <a:solidFill>
                   <a:srgbClr val="EDAB0C"/>
                 </a:solidFill>
@@ -3433,7 +3433,7 @@
               <a:t>■  </a:t>
             </a:r>
             <a:r>
-              <a:rPr sz="1800" b="0" i="0">
+              <a:rPr sz="2400" b="0" i="0">
                 <a:solidFill>
                   <a:srgbClr val="2A2929"/>
                 </a:solidFill>
@@ -3455,7 +3455,7 @@
               </a:spcAft>
             </a:pPr>
             <a:r>
-              <a:rPr sz="1800" b="1" i="0">
+              <a:rPr sz="2400" b="1" i="0">
                 <a:solidFill>
                   <a:srgbClr val="EDAB0C"/>
                 </a:solidFill>
@@ -3464,7 +3464,7 @@
               <a:t>■  </a:t>
             </a:r>
             <a:r>
-              <a:rPr sz="1800" b="0" i="0">
+              <a:rPr sz="2400" b="0" i="0">
                 <a:solidFill>
                   <a:srgbClr val="2A2929"/>
                 </a:solidFill>
@@ -3486,7 +3486,7 @@
               </a:spcAft>
             </a:pPr>
             <a:r>
-              <a:rPr sz="1800" b="1" i="0">
+              <a:rPr sz="2400" b="1" i="0">
                 <a:solidFill>
                   <a:srgbClr val="27B5CE"/>
                 </a:solidFill>
@@ -3495,7 +3495,7 @@
               <a:t>■  </a:t>
             </a:r>
             <a:r>
-              <a:rPr sz="1800" b="1" i="0">
+              <a:rPr sz="2400" b="1" i="0">
                 <a:solidFill>
                   <a:srgbClr val="27B5CE"/>
                 </a:solidFill>
@@ -3765,7 +3765,7 @@
           <a:noFill/>
         </p:spPr>
         <p:txBody>
-          <a:bodyPr wrap="square" anchor="t" lIns="0" rIns="0" tIns="0" bIns="0">
+          <a:bodyPr wrap="square" anchor="ctr" lIns="0" rIns="0" tIns="0" bIns="0">
             <a:spAutoFit/>
           </a:bodyPr>
           <a:lstStyle/>
@@ -3782,7 +3782,7 @@
               </a:spcAft>
             </a:pPr>
             <a:r>
-              <a:rPr sz="1800" b="1" i="0">
+              <a:rPr sz="2400" b="1" i="0">
                 <a:solidFill>
                   <a:srgbClr val="EDAB0C"/>
                 </a:solidFill>
@@ -3791,7 +3791,7 @@
               <a:t>■  </a:t>
             </a:r>
             <a:r>
-              <a:rPr sz="1800" b="0" i="0">
+              <a:rPr sz="2400" b="0" i="0">
                 <a:solidFill>
                   <a:srgbClr val="2A2929"/>
                 </a:solidFill>
@@ -3813,7 +3813,7 @@
               </a:spcAft>
             </a:pPr>
             <a:r>
-              <a:rPr sz="1800" b="1" i="0">
+              <a:rPr sz="2400" b="1" i="0">
                 <a:solidFill>
                   <a:srgbClr val="EDAB0C"/>
                 </a:solidFill>
@@ -3822,7 +3822,7 @@
               <a:t>■  </a:t>
             </a:r>
             <a:r>
-              <a:rPr sz="1800" b="0" i="0">
+              <a:rPr sz="2400" b="0" i="0">
                 <a:solidFill>
                   <a:srgbClr val="2A2929"/>
                 </a:solidFill>
@@ -3844,7 +3844,7 @@
               </a:spcAft>
             </a:pPr>
             <a:r>
-              <a:rPr sz="1800" b="1" i="0">
+              <a:rPr sz="2400" b="1" i="0">
                 <a:solidFill>
                   <a:srgbClr val="27B5CE"/>
                 </a:solidFill>
@@ -3853,7 +3853,7 @@
               <a:t>■  </a:t>
             </a:r>
             <a:r>
-              <a:rPr sz="1800" b="1" i="0">
+              <a:rPr sz="2400" b="1" i="0">
                 <a:solidFill>
                   <a:srgbClr val="27B5CE"/>
                 </a:solidFill>
@@ -3875,7 +3875,7 @@
               </a:spcAft>
             </a:pPr>
             <a:r>
-              <a:rPr sz="1800" b="1" i="0">
+              <a:rPr sz="2400" b="1" i="0">
                 <a:solidFill>
                   <a:srgbClr val="EDAB0C"/>
                 </a:solidFill>
@@ -3884,7 +3884,7 @@
               <a:t>■  </a:t>
             </a:r>
             <a:r>
-              <a:rPr sz="1800" b="0" i="0">
+              <a:rPr sz="2400" b="0" i="0">
                 <a:solidFill>
                   <a:srgbClr val="2A2929"/>
                 </a:solidFill>
@@ -4154,7 +4154,7 @@
           <a:noFill/>
         </p:spPr>
         <p:txBody>
-          <a:bodyPr wrap="square" anchor="t" lIns="0" rIns="0" tIns="0" bIns="0">
+          <a:bodyPr wrap="square" anchor="ctr" lIns="0" rIns="0" tIns="0" bIns="0">
             <a:spAutoFit/>
           </a:bodyPr>
           <a:lstStyle/>
@@ -4171,7 +4171,7 @@
               </a:spcAft>
             </a:pPr>
             <a:r>
-              <a:rPr sz="1800" b="1" i="0">
+              <a:rPr sz="2400" b="1" i="0">
                 <a:solidFill>
                   <a:srgbClr val="EDAB0C"/>
                 </a:solidFill>
@@ -4180,7 +4180,7 @@
               <a:t>■  </a:t>
             </a:r>
             <a:r>
-              <a:rPr sz="1800" b="0" i="0">
+              <a:rPr sz="2400" b="0" i="0">
                 <a:solidFill>
                   <a:srgbClr val="2A2929"/>
                 </a:solidFill>
@@ -4202,7 +4202,7 @@
               </a:spcAft>
             </a:pPr>
             <a:r>
-              <a:rPr sz="1800" b="1" i="0">
+              <a:rPr sz="2400" b="1" i="0">
                 <a:solidFill>
                   <a:srgbClr val="27B5CE"/>
                 </a:solidFill>
@@ -4211,7 +4211,7 @@
               <a:t>■  </a:t>
             </a:r>
             <a:r>
-              <a:rPr sz="1800" b="1" i="0">
+              <a:rPr sz="2400" b="1" i="0">
                 <a:solidFill>
                   <a:srgbClr val="27B5CE"/>
                 </a:solidFill>
@@ -4233,7 +4233,7 @@
               </a:spcAft>
             </a:pPr>
             <a:r>
-              <a:rPr sz="1800" b="1" i="0">
+              <a:rPr sz="2400" b="1" i="0">
                 <a:solidFill>
                   <a:srgbClr val="EDAB0C"/>
                 </a:solidFill>
@@ -4242,7 +4242,7 @@
               <a:t>■  </a:t>
             </a:r>
             <a:r>
-              <a:rPr sz="1800" b="0" i="0">
+              <a:rPr sz="2400" b="0" i="0">
                 <a:solidFill>
                   <a:srgbClr val="2A2929"/>
                 </a:solidFill>
@@ -6068,7 +6068,7 @@
           <a:noFill/>
         </p:spPr>
         <p:txBody>
-          <a:bodyPr wrap="square" anchor="t" lIns="0" rIns="0" tIns="0" bIns="0">
+          <a:bodyPr wrap="square" anchor="ctr" lIns="0" rIns="0" tIns="0" bIns="0">
             <a:spAutoFit/>
           </a:bodyPr>
           <a:lstStyle/>
@@ -6085,7 +6085,7 @@
               </a:spcAft>
             </a:pPr>
             <a:r>
-              <a:rPr sz="1800" b="1" i="0">
+              <a:rPr sz="2400" b="1" i="0">
                 <a:solidFill>
                   <a:srgbClr val="EDAB0C"/>
                 </a:solidFill>
@@ -6094,7 +6094,7 @@
               <a:t>■  </a:t>
             </a:r>
             <a:r>
-              <a:rPr sz="1800" b="0" i="0">
+              <a:rPr sz="2400" b="0" i="0">
                 <a:solidFill>
                   <a:srgbClr val="2A2929"/>
                 </a:solidFill>
@@ -6116,7 +6116,7 @@
               </a:spcAft>
             </a:pPr>
             <a:r>
-              <a:rPr sz="1800" b="1" i="0">
+              <a:rPr sz="2400" b="1" i="0">
                 <a:solidFill>
                   <a:srgbClr val="205F61"/>
                 </a:solidFill>
@@ -6125,7 +6125,7 @@
               <a:t>■  </a:t>
             </a:r>
             <a:r>
-              <a:rPr sz="1800" b="1" i="0">
+              <a:rPr sz="2400" b="1" i="0">
                 <a:solidFill>
                   <a:srgbClr val="205F61"/>
                 </a:solidFill>
@@ -6147,7 +6147,7 @@
               </a:spcAft>
             </a:pPr>
             <a:r>
-              <a:rPr sz="1800" b="1" i="0">
+              <a:rPr sz="2400" b="1" i="0">
                 <a:solidFill>
                   <a:srgbClr val="EDAB0C"/>
                 </a:solidFill>
@@ -6156,7 +6156,7 @@
               <a:t>■  </a:t>
             </a:r>
             <a:r>
-              <a:rPr sz="1800" b="0" i="0">
+              <a:rPr sz="2400" b="0" i="0">
                 <a:solidFill>
                   <a:srgbClr val="2A2929"/>
                 </a:solidFill>
@@ -6426,7 +6426,7 @@
           <a:noFill/>
         </p:spPr>
         <p:txBody>
-          <a:bodyPr wrap="square" anchor="t" lIns="0" rIns="0" tIns="0" bIns="0">
+          <a:bodyPr wrap="square" anchor="ctr" lIns="0" rIns="0" tIns="0" bIns="0">
             <a:spAutoFit/>
           </a:bodyPr>
           <a:lstStyle/>
@@ -6443,7 +6443,7 @@
               </a:spcAft>
             </a:pPr>
             <a:r>
-              <a:rPr sz="1800" b="1" i="0">
+              <a:rPr sz="2400" b="1" i="0">
                 <a:solidFill>
                   <a:srgbClr val="EDAB0C"/>
                 </a:solidFill>
@@ -6452,7 +6452,7 @@
               <a:t>■  </a:t>
             </a:r>
             <a:r>
-              <a:rPr sz="1800" b="0" i="0">
+              <a:rPr sz="2400" b="0" i="0">
                 <a:solidFill>
                   <a:srgbClr val="2A2929"/>
                 </a:solidFill>
@@ -6474,7 +6474,7 @@
               </a:spcAft>
             </a:pPr>
             <a:r>
-              <a:rPr sz="1800" b="1" i="0">
+              <a:rPr sz="2400" b="1" i="0">
                 <a:solidFill>
                   <a:srgbClr val="EDAB0C"/>
                 </a:solidFill>
@@ -6483,7 +6483,7 @@
               <a:t>■  </a:t>
             </a:r>
             <a:r>
-              <a:rPr sz="1800" b="0" i="0">
+              <a:rPr sz="2400" b="0" i="0">
                 <a:solidFill>
                   <a:srgbClr val="2A2929"/>
                 </a:solidFill>
@@ -6505,7 +6505,7 @@
               </a:spcAft>
             </a:pPr>
             <a:r>
-              <a:rPr sz="1800" b="1" i="0">
+              <a:rPr sz="2400" b="1" i="0">
                 <a:solidFill>
                   <a:srgbClr val="EDAB0C"/>
                 </a:solidFill>
@@ -6514,7 +6514,7 @@
               <a:t>■  </a:t>
             </a:r>
             <a:r>
-              <a:rPr sz="1800" b="0" i="0">
+              <a:rPr sz="2400" b="0" i="0">
                 <a:solidFill>
                   <a:srgbClr val="2A2929"/>
                 </a:solidFill>
@@ -6536,7 +6536,7 @@
               </a:spcAft>
             </a:pPr>
             <a:r>
-              <a:rPr sz="1800" b="1" i="0">
+              <a:rPr sz="2400" b="1" i="0">
                 <a:solidFill>
                   <a:srgbClr val="205F61"/>
                 </a:solidFill>
@@ -6545,7 +6545,7 @@
               <a:t>■  </a:t>
             </a:r>
             <a:r>
-              <a:rPr sz="1800" b="1" i="0">
+              <a:rPr sz="2400" b="1" i="0">
                 <a:solidFill>
                   <a:srgbClr val="205F61"/>
                 </a:solidFill>
@@ -7703,7 +7703,7 @@
           <a:noFill/>
         </p:spPr>
         <p:txBody>
-          <a:bodyPr wrap="square" anchor="t" lIns="0" rIns="0" tIns="0" bIns="0">
+          <a:bodyPr wrap="square" anchor="ctr" lIns="0" rIns="0" tIns="0" bIns="0">
             <a:spAutoFit/>
           </a:bodyPr>
           <a:lstStyle/>
@@ -7720,7 +7720,7 @@
               </a:spcAft>
             </a:pPr>
             <a:r>
-              <a:rPr sz="1800" b="1" i="0">
+              <a:rPr sz="2400" b="1" i="0">
                 <a:solidFill>
                   <a:srgbClr val="EDAB0C"/>
                 </a:solidFill>
@@ -7729,7 +7729,7 @@
               <a:t>■  </a:t>
             </a:r>
             <a:r>
-              <a:rPr sz="1800" b="0" i="0">
+              <a:rPr sz="2400" b="0" i="0">
                 <a:solidFill>
                   <a:srgbClr val="2A2929"/>
                 </a:solidFill>
@@ -7751,7 +7751,7 @@
               </a:spcAft>
             </a:pPr>
             <a:r>
-              <a:rPr sz="1800" b="1" i="0">
+              <a:rPr sz="2400" b="1" i="0">
                 <a:solidFill>
                   <a:srgbClr val="92268F"/>
                 </a:solidFill>
@@ -7760,7 +7760,7 @@
               <a:t>■  </a:t>
             </a:r>
             <a:r>
-              <a:rPr sz="1800" b="1" i="0">
+              <a:rPr sz="2400" b="1" i="0">
                 <a:solidFill>
                   <a:srgbClr val="92268F"/>
                 </a:solidFill>
@@ -7782,7 +7782,7 @@
               </a:spcAft>
             </a:pPr>
             <a:r>
-              <a:rPr sz="1800" b="1" i="0">
+              <a:rPr sz="2400" b="1" i="0">
                 <a:solidFill>
                   <a:srgbClr val="EDAB0C"/>
                 </a:solidFill>
@@ -7791,7 +7791,7 @@
               <a:t>■  </a:t>
             </a:r>
             <a:r>
-              <a:rPr sz="1800" b="0" i="0">
+              <a:rPr sz="2400" b="0" i="0">
                 <a:solidFill>
                   <a:srgbClr val="2A2929"/>
                 </a:solidFill>
@@ -10140,7 +10140,7 @@
           <a:noFill/>
         </p:spPr>
         <p:txBody>
-          <a:bodyPr wrap="square" anchor="t" lIns="0" rIns="0" tIns="0" bIns="0">
+          <a:bodyPr wrap="square" anchor="ctr" lIns="0" rIns="0" tIns="0" bIns="0">
             <a:spAutoFit/>
           </a:bodyPr>
           <a:lstStyle/>
@@ -10157,7 +10157,7 @@
               </a:spcAft>
             </a:pPr>
             <a:r>
-              <a:rPr sz="1800" b="1" i="0">
+              <a:rPr sz="2400" b="1" i="0">
                 <a:solidFill>
                   <a:srgbClr val="EDAB0C"/>
                 </a:solidFill>
@@ -10166,7 +10166,7 @@
               <a:t>■  </a:t>
             </a:r>
             <a:r>
-              <a:rPr sz="1800" b="0" i="0">
+              <a:rPr sz="2400" b="0" i="0">
                 <a:solidFill>
                   <a:srgbClr val="2A2929"/>
                 </a:solidFill>
@@ -10188,7 +10188,7 @@
               </a:spcAft>
             </a:pPr>
             <a:r>
-              <a:rPr sz="1800" b="1" i="0">
+              <a:rPr sz="2400" b="1" i="0">
                 <a:solidFill>
                   <a:srgbClr val="EDAB0C"/>
                 </a:solidFill>
@@ -10197,7 +10197,7 @@
               <a:t>■  </a:t>
             </a:r>
             <a:r>
-              <a:rPr sz="1800" b="0" i="0">
+              <a:rPr sz="2400" b="0" i="0">
                 <a:solidFill>
                   <a:srgbClr val="2A2929"/>
                 </a:solidFill>
@@ -10219,7 +10219,7 @@
               </a:spcAft>
             </a:pPr>
             <a:r>
-              <a:rPr sz="1800" b="1" i="0">
+              <a:rPr sz="2400" b="1" i="0">
                 <a:solidFill>
                   <a:srgbClr val="92268F"/>
                 </a:solidFill>
@@ -10228,7 +10228,7 @@
               <a:t>■  </a:t>
             </a:r>
             <a:r>
-              <a:rPr sz="1800" b="1" i="0">
+              <a:rPr sz="2400" b="1" i="0">
                 <a:solidFill>
                   <a:srgbClr val="92268F"/>
                 </a:solidFill>
@@ -10498,7 +10498,7 @@
           <a:noFill/>
         </p:spPr>
         <p:txBody>
-          <a:bodyPr wrap="square" anchor="t" lIns="0" rIns="0" tIns="0" bIns="0">
+          <a:bodyPr wrap="square" anchor="ctr" lIns="0" rIns="0" tIns="0" bIns="0">
             <a:spAutoFit/>
           </a:bodyPr>
           <a:lstStyle/>
@@ -10515,7 +10515,7 @@
               </a:spcAft>
             </a:pPr>
             <a:r>
-              <a:rPr sz="1800" b="1" i="0">
+              <a:rPr sz="2400" b="1" i="0">
                 <a:solidFill>
                   <a:srgbClr val="EDAB0C"/>
                 </a:solidFill>
@@ -10524,7 +10524,7 @@
               <a:t>■  </a:t>
             </a:r>
             <a:r>
-              <a:rPr sz="1800" b="0" i="0">
+              <a:rPr sz="2400" b="0" i="0">
                 <a:solidFill>
                   <a:srgbClr val="2A2929"/>
                 </a:solidFill>
@@ -10546,7 +10546,7 @@
               </a:spcAft>
             </a:pPr>
             <a:r>
-              <a:rPr sz="1800" b="1" i="0">
+              <a:rPr sz="2400" b="1" i="0">
                 <a:solidFill>
                   <a:srgbClr val="EDAB0C"/>
                 </a:solidFill>
@@ -10555,7 +10555,7 @@
               <a:t>■  </a:t>
             </a:r>
             <a:r>
-              <a:rPr sz="1800" b="0" i="0">
+              <a:rPr sz="2400" b="0" i="0">
                 <a:solidFill>
                   <a:srgbClr val="2A2929"/>
                 </a:solidFill>
@@ -10577,7 +10577,7 @@
               </a:spcAft>
             </a:pPr>
             <a:r>
-              <a:rPr sz="1800" b="1" i="0">
+              <a:rPr sz="2400" b="1" i="0">
                 <a:solidFill>
                   <a:srgbClr val="92268F"/>
                 </a:solidFill>
@@ -10586,7 +10586,7 @@
               <a:t>■  </a:t>
             </a:r>
             <a:r>
-              <a:rPr sz="1800" b="1" i="0">
+              <a:rPr sz="2400" b="1" i="0">
                 <a:solidFill>
                   <a:srgbClr val="92268F"/>
                 </a:solidFill>
@@ -10856,7 +10856,7 @@
           <a:noFill/>
         </p:spPr>
         <p:txBody>
-          <a:bodyPr wrap="square" anchor="t" lIns="0" rIns="0" tIns="0" bIns="0">
+          <a:bodyPr wrap="square" anchor="ctr" lIns="0" rIns="0" tIns="0" bIns="0">
             <a:spAutoFit/>
           </a:bodyPr>
           <a:lstStyle/>
@@ -10873,7 +10873,7 @@
               </a:spcAft>
             </a:pPr>
             <a:r>
-              <a:rPr sz="1800" b="1" i="0">
+              <a:rPr sz="2400" b="1" i="0">
                 <a:solidFill>
                   <a:srgbClr val="EDAB0C"/>
                 </a:solidFill>
@@ -10882,7 +10882,7 @@
               <a:t>■  </a:t>
             </a:r>
             <a:r>
-              <a:rPr sz="1800" b="0" i="0">
+              <a:rPr sz="2400" b="0" i="0">
                 <a:solidFill>
                   <a:srgbClr val="2A2929"/>
                 </a:solidFill>
@@ -10904,7 +10904,7 @@
               </a:spcAft>
             </a:pPr>
             <a:r>
-              <a:rPr sz="1800" b="1" i="0">
+              <a:rPr sz="2400" b="1" i="0">
                 <a:solidFill>
                   <a:srgbClr val="92268F"/>
                 </a:solidFill>
@@ -10913,7 +10913,7 @@
               <a:t>■  </a:t>
             </a:r>
             <a:r>
-              <a:rPr sz="1800" b="1" i="0">
+              <a:rPr sz="2400" b="1" i="0">
                 <a:solidFill>
                   <a:srgbClr val="92268F"/>
                 </a:solidFill>
@@ -10935,7 +10935,7 @@
               </a:spcAft>
             </a:pPr>
             <a:r>
-              <a:rPr sz="1800" b="1" i="0">
+              <a:rPr sz="2400" b="1" i="0">
                 <a:solidFill>
                   <a:srgbClr val="EDAB0C"/>
                 </a:solidFill>
@@ -10944,7 +10944,7 @@
               <a:t>■  </a:t>
             </a:r>
             <a:r>
-              <a:rPr sz="1800" b="0" i="0">
+              <a:rPr sz="2400" b="0" i="0">
                 <a:solidFill>
                   <a:srgbClr val="2A2929"/>
                 </a:solidFill>

--- a/S1-CL1-Cloud-Design-Build/delivery/topic_11/Topic_11_Slides.pptx
+++ b/S1-CL1-Cloud-Design-Build/delivery/topic_11/Topic_11_Slides.pptx
@@ -7,26 +7,26 @@
   <p:sldIdLst>
     <p:sldId id="256" r:id="rId7"/>
     <p:sldId id="257" r:id="rId8"/>
-    <p:sldId id="258" r:id="rId9"/>
-    <p:sldId id="259" r:id="rId10"/>
-    <p:sldId id="260" r:id="rId11"/>
-    <p:sldId id="261" r:id="rId12"/>
-    <p:sldId id="262" r:id="rId13"/>
-    <p:sldId id="263" r:id="rId14"/>
-    <p:sldId id="264" r:id="rId15"/>
-    <p:sldId id="265" r:id="rId16"/>
-    <p:sldId id="266" r:id="rId17"/>
-    <p:sldId id="267" r:id="rId18"/>
-    <p:sldId id="268" r:id="rId19"/>
-    <p:sldId id="269" r:id="rId20"/>
-    <p:sldId id="270" r:id="rId21"/>
-    <p:sldId id="271" r:id="rId22"/>
-    <p:sldId id="272" r:id="rId23"/>
-    <p:sldId id="273" r:id="rId24"/>
-    <p:sldId id="274" r:id="rId25"/>
-    <p:sldId id="275" r:id="rId26"/>
-    <p:sldId id="276" r:id="rId27"/>
-    <p:sldId id="277" r:id="rId28"/>
+    <p:sldId id="258" r:id="rId10"/>
+    <p:sldId id="259" r:id="rId11"/>
+    <p:sldId id="260" r:id="rId12"/>
+    <p:sldId id="261" r:id="rId13"/>
+    <p:sldId id="262" r:id="rId14"/>
+    <p:sldId id="263" r:id="rId15"/>
+    <p:sldId id="264" r:id="rId16"/>
+    <p:sldId id="265" r:id="rId17"/>
+    <p:sldId id="266" r:id="rId18"/>
+    <p:sldId id="267" r:id="rId19"/>
+    <p:sldId id="268" r:id="rId20"/>
+    <p:sldId id="269" r:id="rId21"/>
+    <p:sldId id="270" r:id="rId22"/>
+    <p:sldId id="271" r:id="rId23"/>
+    <p:sldId id="272" r:id="rId24"/>
+    <p:sldId id="273" r:id="rId25"/>
+    <p:sldId id="274" r:id="rId26"/>
+    <p:sldId id="275" r:id="rId27"/>
+    <p:sldId id="276" r:id="rId28"/>
+    <p:sldId id="277" r:id="rId29"/>
   </p:sldIdLst>
   <p:sldSz cx="12191695" cy="6858000" type="screen4x3"/>
   <p:notesSz cx="6858000" cy="9144000"/>
@@ -126,6 +126,2161 @@
     </a:lvl9pPr>
   </p:defaultTextStyle>
 </p:presentation>
+</file>
+
+<file path=ppt/notesMasters/notesMaster1.xml><?xml version="1.0" encoding="utf-8"?>
+<p:notesMaster xmlns:a="http://schemas.openxmlformats.org/drawingml/2006/main" xmlns:p="http://schemas.openxmlformats.org/presentationml/2006/main" xmlns:r="http://schemas.openxmlformats.org/officeDocument/2006/relationships">
+  <p:cSld>
+    <p:bg>
+      <p:bgRef idx="1001">
+        <a:schemeClr val="bg1"/>
+      </p:bgRef>
+    </p:bg>
+    <p:spTree>
+      <p:nvGrpSpPr>
+        <p:cNvPr id="1" name=""/>
+        <p:cNvGrpSpPr/>
+        <p:nvPr/>
+      </p:nvGrpSpPr>
+      <p:grpSpPr>
+        <a:xfrm>
+          <a:off x="0" y="0"/>
+          <a:ext cx="0" cy="0"/>
+          <a:chOff x="0" y="0"/>
+          <a:chExt cx="0" cy="0"/>
+        </a:xfrm>
+      </p:grpSpPr>
+      <p:sp>
+        <p:nvSpPr>
+          <p:cNvPr id="2" name="Header Placeholder 1"/>
+          <p:cNvSpPr>
+            <a:spLocks noGrp="1"/>
+          </p:cNvSpPr>
+          <p:nvPr>
+            <p:ph type="hdr" sz="quarter"/>
+          </p:nvPr>
+        </p:nvSpPr>
+        <p:spPr>
+          <a:xfrm>
+            <a:off x="0" y="0"/>
+            <a:ext cx="2971800" cy="457200"/>
+          </a:xfrm>
+          <a:prstGeom prst="rect">
+            <a:avLst/>
+          </a:prstGeom>
+        </p:spPr>
+        <p:txBody>
+          <a:bodyPr vert="horz" lIns="91440" tIns="45720" rIns="91440" bIns="45720" rtlCol="0"/>
+          <a:lstStyle>
+            <a:lvl1pPr algn="l">
+              <a:defRPr sz="1200"/>
+            </a:lvl1pPr>
+          </a:lstStyle>
+          <a:p>
+            <a:endParaRPr lang="en-US"/>
+          </a:p>
+        </p:txBody>
+      </p:sp>
+      <p:sp>
+        <p:nvSpPr>
+          <p:cNvPr id="3" name="Date Placeholder 2"/>
+          <p:cNvSpPr>
+            <a:spLocks noGrp="1"/>
+          </p:cNvSpPr>
+          <p:nvPr>
+            <p:ph type="dt" idx="1"/>
+          </p:nvPr>
+        </p:nvSpPr>
+        <p:spPr>
+          <a:xfrm>
+            <a:off x="3884613" y="0"/>
+            <a:ext cx="2971800" cy="457200"/>
+          </a:xfrm>
+          <a:prstGeom prst="rect">
+            <a:avLst/>
+          </a:prstGeom>
+        </p:spPr>
+        <p:txBody>
+          <a:bodyPr vert="horz" lIns="91440" tIns="45720" rIns="91440" bIns="45720" rtlCol="0"/>
+          <a:lstStyle>
+            <a:lvl1pPr algn="r">
+              <a:defRPr sz="1200"/>
+            </a:lvl1pPr>
+          </a:lstStyle>
+          <a:p>
+            <a:fld id="{0F89C1C7-3DCD-1040-A9CF-14679D8B5DDD}" type="datetimeFigureOut">
+              <a:rPr lang="en-US" smtClean="0"/>
+              <a:t>10/17/16</a:t>
+            </a:fld>
+            <a:endParaRPr lang="en-US"/>
+          </a:p>
+        </p:txBody>
+      </p:sp>
+      <p:sp>
+        <p:nvSpPr>
+          <p:cNvPr id="4" name="Slide Image Placeholder 3"/>
+          <p:cNvSpPr>
+            <a:spLocks noGrp="1" noRot="1" noChangeAspect="1"/>
+          </p:cNvSpPr>
+          <p:nvPr>
+            <p:ph type="sldImg" idx="2"/>
+          </p:nvPr>
+        </p:nvSpPr>
+        <p:spPr>
+          <a:xfrm>
+            <a:off x="1143000" y="685800"/>
+            <a:ext cx="4572000" cy="3429000"/>
+          </a:xfrm>
+          <a:prstGeom prst="rect">
+            <a:avLst/>
+          </a:prstGeom>
+          <a:noFill/>
+          <a:ln w="12700">
+            <a:solidFill>
+              <a:prstClr val="black"/>
+            </a:solidFill>
+          </a:ln>
+        </p:spPr>
+        <p:txBody>
+          <a:bodyPr vert="horz" lIns="91440" tIns="45720" rIns="91440" bIns="45720" rtlCol="0" anchor="ctr"/>
+          <a:lstStyle/>
+          <a:p>
+            <a:endParaRPr lang="en-US"/>
+          </a:p>
+        </p:txBody>
+      </p:sp>
+      <p:sp>
+        <p:nvSpPr>
+          <p:cNvPr id="5" name="Notes Placeholder 4"/>
+          <p:cNvSpPr>
+            <a:spLocks noGrp="1"/>
+          </p:cNvSpPr>
+          <p:nvPr>
+            <p:ph type="body" sz="quarter" idx="3"/>
+          </p:nvPr>
+        </p:nvSpPr>
+        <p:spPr>
+          <a:xfrm>
+            <a:off x="685800" y="4343400"/>
+            <a:ext cx="5486400" cy="4114800"/>
+          </a:xfrm>
+          <a:prstGeom prst="rect">
+            <a:avLst/>
+          </a:prstGeom>
+        </p:spPr>
+        <p:txBody>
+          <a:bodyPr vert="horz" lIns="91440" tIns="45720" rIns="91440" bIns="45720" rtlCol="0"/>
+          <a:lstStyle/>
+          <a:p>
+            <a:pPr lvl="0"/>
+            <a:r>
+              <a:rPr lang="en-US" smtClean="0"/>
+              <a:t>Click to edit Master text styles</a:t>
+            </a:r>
+          </a:p>
+          <a:p>
+            <a:pPr lvl="1"/>
+            <a:r>
+              <a:rPr lang="en-US" smtClean="0"/>
+              <a:t>Second level</a:t>
+            </a:r>
+          </a:p>
+          <a:p>
+            <a:pPr lvl="2"/>
+            <a:r>
+              <a:rPr lang="en-US" smtClean="0"/>
+              <a:t>Third level</a:t>
+            </a:r>
+          </a:p>
+          <a:p>
+            <a:pPr lvl="3"/>
+            <a:r>
+              <a:rPr lang="en-US" smtClean="0"/>
+              <a:t>Fourth level</a:t>
+            </a:r>
+          </a:p>
+          <a:p>
+            <a:pPr lvl="4"/>
+            <a:r>
+              <a:rPr lang="en-US" smtClean="0"/>
+              <a:t>Fifth level</a:t>
+            </a:r>
+            <a:endParaRPr lang="en-US"/>
+          </a:p>
+        </p:txBody>
+      </p:sp>
+      <p:sp>
+        <p:nvSpPr>
+          <p:cNvPr id="6" name="Footer Placeholder 5"/>
+          <p:cNvSpPr>
+            <a:spLocks noGrp="1"/>
+          </p:cNvSpPr>
+          <p:nvPr>
+            <p:ph type="ftr" sz="quarter" idx="4"/>
+          </p:nvPr>
+        </p:nvSpPr>
+        <p:spPr>
+          <a:xfrm>
+            <a:off x="0" y="8685213"/>
+            <a:ext cx="2971800" cy="457200"/>
+          </a:xfrm>
+          <a:prstGeom prst="rect">
+            <a:avLst/>
+          </a:prstGeom>
+        </p:spPr>
+        <p:txBody>
+          <a:bodyPr vert="horz" lIns="91440" tIns="45720" rIns="91440" bIns="45720" rtlCol="0" anchor="b"/>
+          <a:lstStyle>
+            <a:lvl1pPr algn="l">
+              <a:defRPr sz="1200"/>
+            </a:lvl1pPr>
+          </a:lstStyle>
+          <a:p>
+            <a:endParaRPr lang="en-US"/>
+          </a:p>
+        </p:txBody>
+      </p:sp>
+      <p:sp>
+        <p:nvSpPr>
+          <p:cNvPr id="7" name="Slide Number Placeholder 6"/>
+          <p:cNvSpPr>
+            <a:spLocks noGrp="1"/>
+          </p:cNvSpPr>
+          <p:nvPr>
+            <p:ph type="sldNum" sz="quarter" idx="5"/>
+          </p:nvPr>
+        </p:nvSpPr>
+        <p:spPr>
+          <a:xfrm>
+            <a:off x="3884613" y="8685213"/>
+            <a:ext cx="2971800" cy="457200"/>
+          </a:xfrm>
+          <a:prstGeom prst="rect">
+            <a:avLst/>
+          </a:prstGeom>
+        </p:spPr>
+        <p:txBody>
+          <a:bodyPr vert="horz" lIns="91440" tIns="45720" rIns="91440" bIns="45720" rtlCol="0" anchor="b"/>
+          <a:lstStyle>
+            <a:lvl1pPr algn="r">
+              <a:defRPr sz="1200"/>
+            </a:lvl1pPr>
+          </a:lstStyle>
+          <a:p>
+            <a:fld id="{BB5E49A5-4136-284D-997B-48E1D791AD67}" type="slidenum">
+              <a:rPr lang="en-US" smtClean="0"/>
+              <a:t>‹#›</a:t>
+            </a:fld>
+            <a:endParaRPr lang="en-US"/>
+          </a:p>
+        </p:txBody>
+      </p:sp>
+    </p:spTree>
+    <p:extLst>
+      <p:ext uri="{BB962C8B-B14F-4D97-AF65-F5344CB8AC3E}">
+        <p14:creationId xmlns:p14="http://schemas.microsoft.com/office/powerpoint/2010/main" val="2623252185"/>
+      </p:ext>
+    </p:extLst>
+  </p:cSld>
+  <p:clrMap bg1="lt1" tx1="dk1" bg2="lt2" tx2="dk2" accent1="accent1" accent2="accent2" accent3="accent3" accent4="accent4" accent5="accent5" accent6="accent6" hlink="hlink" folHlink="folHlink"/>
+  <p:notesStyle>
+    <a:lvl1pPr marL="0" algn="l" defTabSz="457200" rtl="0" eaLnBrk="1" latinLnBrk="0" hangingPunct="1">
+      <a:defRPr sz="1200" kern="1200">
+        <a:solidFill>
+          <a:schemeClr val="tx1"/>
+        </a:solidFill>
+        <a:latin typeface="+mn-lt"/>
+        <a:ea typeface="+mn-ea"/>
+        <a:cs typeface="+mn-cs"/>
+      </a:defRPr>
+    </a:lvl1pPr>
+    <a:lvl2pPr marL="457200" algn="l" defTabSz="457200" rtl="0" eaLnBrk="1" latinLnBrk="0" hangingPunct="1">
+      <a:defRPr sz="1200" kern="1200">
+        <a:solidFill>
+          <a:schemeClr val="tx1"/>
+        </a:solidFill>
+        <a:latin typeface="+mn-lt"/>
+        <a:ea typeface="+mn-ea"/>
+        <a:cs typeface="+mn-cs"/>
+      </a:defRPr>
+    </a:lvl2pPr>
+    <a:lvl3pPr marL="914400" algn="l" defTabSz="457200" rtl="0" eaLnBrk="1" latinLnBrk="0" hangingPunct="1">
+      <a:defRPr sz="1200" kern="1200">
+        <a:solidFill>
+          <a:schemeClr val="tx1"/>
+        </a:solidFill>
+        <a:latin typeface="+mn-lt"/>
+        <a:ea typeface="+mn-ea"/>
+        <a:cs typeface="+mn-cs"/>
+      </a:defRPr>
+    </a:lvl3pPr>
+    <a:lvl4pPr marL="1371600" algn="l" defTabSz="457200" rtl="0" eaLnBrk="1" latinLnBrk="0" hangingPunct="1">
+      <a:defRPr sz="1200" kern="1200">
+        <a:solidFill>
+          <a:schemeClr val="tx1"/>
+        </a:solidFill>
+        <a:latin typeface="+mn-lt"/>
+        <a:ea typeface="+mn-ea"/>
+        <a:cs typeface="+mn-cs"/>
+      </a:defRPr>
+    </a:lvl4pPr>
+    <a:lvl5pPr marL="1828800" algn="l" defTabSz="457200" rtl="0" eaLnBrk="1" latinLnBrk="0" hangingPunct="1">
+      <a:defRPr sz="1200" kern="1200">
+        <a:solidFill>
+          <a:schemeClr val="tx1"/>
+        </a:solidFill>
+        <a:latin typeface="+mn-lt"/>
+        <a:ea typeface="+mn-ea"/>
+        <a:cs typeface="+mn-cs"/>
+      </a:defRPr>
+    </a:lvl5pPr>
+    <a:lvl6pPr marL="2286000" algn="l" defTabSz="457200" rtl="0" eaLnBrk="1" latinLnBrk="0" hangingPunct="1">
+      <a:defRPr sz="1200" kern="1200">
+        <a:solidFill>
+          <a:schemeClr val="tx1"/>
+        </a:solidFill>
+        <a:latin typeface="+mn-lt"/>
+        <a:ea typeface="+mn-ea"/>
+        <a:cs typeface="+mn-cs"/>
+      </a:defRPr>
+    </a:lvl6pPr>
+    <a:lvl7pPr marL="2743200" algn="l" defTabSz="457200" rtl="0" eaLnBrk="1" latinLnBrk="0" hangingPunct="1">
+      <a:defRPr sz="1200" kern="1200">
+        <a:solidFill>
+          <a:schemeClr val="tx1"/>
+        </a:solidFill>
+        <a:latin typeface="+mn-lt"/>
+        <a:ea typeface="+mn-ea"/>
+        <a:cs typeface="+mn-cs"/>
+      </a:defRPr>
+    </a:lvl7pPr>
+    <a:lvl8pPr marL="3200400" algn="l" defTabSz="457200" rtl="0" eaLnBrk="1" latinLnBrk="0" hangingPunct="1">
+      <a:defRPr sz="1200" kern="1200">
+        <a:solidFill>
+          <a:schemeClr val="tx1"/>
+        </a:solidFill>
+        <a:latin typeface="+mn-lt"/>
+        <a:ea typeface="+mn-ea"/>
+        <a:cs typeface="+mn-cs"/>
+      </a:defRPr>
+    </a:lvl8pPr>
+    <a:lvl9pPr marL="3657600" algn="l" defTabSz="457200" rtl="0" eaLnBrk="1" latinLnBrk="0" hangingPunct="1">
+      <a:defRPr sz="1200" kern="1200">
+        <a:solidFill>
+          <a:schemeClr val="tx1"/>
+        </a:solidFill>
+        <a:latin typeface="+mn-lt"/>
+        <a:ea typeface="+mn-ea"/>
+        <a:cs typeface="+mn-cs"/>
+      </a:defRPr>
+    </a:lvl9pPr>
+  </p:notesStyle>
+</p:notesMaster>
+</file>
+
+<file path=ppt/notesSlides/notesSlide1.xml><?xml version="1.0" encoding="utf-8"?>
+<p:notes xmlns:a="http://schemas.openxmlformats.org/drawingml/2006/main" xmlns:p="http://schemas.openxmlformats.org/presentationml/2006/main" xmlns:r="http://schemas.openxmlformats.org/officeDocument/2006/relationships">
+  <p:cSld>
+    <p:spTree>
+      <p:nvGrpSpPr>
+        <p:cNvPr id="1" name=""/>
+        <p:cNvGrpSpPr/>
+        <p:nvPr/>
+      </p:nvGrpSpPr>
+      <p:grpSpPr>
+        <a:xfrm>
+          <a:off x="0" y="0"/>
+          <a:ext cx="0" cy="0"/>
+          <a:chOff x="0" y="0"/>
+          <a:chExt cx="0" cy="0"/>
+        </a:xfrm>
+      </p:grpSpPr>
+      <p:sp>
+        <p:nvSpPr>
+          <p:cNvPr id="2" name="Slide Image Placeholder 1"/>
+          <p:cNvSpPr>
+            <a:spLocks noGrp="1"/>
+          </p:cNvSpPr>
+          <p:nvPr>
+            <p:ph type="sldImg" idx="2"/>
+          </p:nvPr>
+        </p:nvSpPr>
+        <p:spPr/>
+      </p:sp>
+      <p:sp>
+        <p:nvSpPr>
+          <p:cNvPr id="3" name="Notes Placeholder 2"/>
+          <p:cNvSpPr>
+            <a:spLocks noGrp="1"/>
+          </p:cNvSpPr>
+          <p:nvPr>
+            <p:ph type="body" idx="3" sz="quarter"/>
+          </p:nvPr>
+        </p:nvSpPr>
+        <p:spPr/>
+        <p:txBody>
+          <a:bodyPr/>
+          <a:lstStyle/>
+          <a:p>
+            <a:r>
+              <a:t>Frame this as the map for the whole AT3 arc — set expectations, don't teach HA content yet.</a:t>
+            </a:r>
+          </a:p>
+          <a:p>
+            <a:r>
+              <a:t>• Where this fits: AT2 built a working SINGLE-AZ baseline. AT3's job is to make it highly</a:t>
+            </a:r>
+          </a:p>
+          <a:p>
+            <a:r>
+              <a:t>  available — resilient to losing an Availability Zone. This Topic is the vocabulary.</a:t>
+            </a:r>
+          </a:p>
+          <a:p>
+            <a:r>
+              <a:t>• Walk the four-Topic arc off the accent-bold line: T11 = concepts (today), T12 = you DESIGN</a:t>
+            </a:r>
+          </a:p>
+          <a:p>
+            <a:r>
+              <a:t>  the upgrade, T13 = you implement + simulate the failure, T14 = you close out. Say it plainly</a:t>
+            </a:r>
+          </a:p>
+          <a:p>
+            <a:r>
+              <a:t>  so the keen student knows nothing gets built today.</a:t>
+            </a:r>
+          </a:p>
+          <a:p>
+            <a:r>
+              <a:t>• What today gives them: the words — availability, fault tolerance, SPOFs, recovery objectives —</a:t>
+            </a:r>
+          </a:p>
+          <a:p>
+            <a:r>
+              <a:t>  plus the cloud toolkit that removes each weakness. Everything downstream reuses this.</a:t>
+            </a:r>
+          </a:p>
+          <a:p>
+            <a:r>
+              <a:t>• How they practise: on the single-AZ Accounting baseline (Ledgerline) — the same client system</a:t>
+            </a:r>
+          </a:p>
+          <a:p>
+            <a:r>
+              <a:t>  they've carried all term; today they learn to REASON about its availability.</a:t>
+            </a:r>
+          </a:p>
+          <a:p>
+            <a:r>
+              <a:t>Misconception to pre-empt: "we're on the cloud, so we're already highly available." No — a</a:t>
+            </a:r>
+          </a:p>
+          <a:p>
+            <a:r>
+              <a:t>single-AZ cloud design has a SPOF just like on-prem; HA is DESIGNED, not automatic.</a:t>
+            </a:r>
+          </a:p>
+          <a:p>
+            <a:r>
+              <a:t>Question to pose: "The baseline works — so what's actually wrong with it that AT3 has to fix?"</a:t>
+            </a:r>
+          </a:p>
+          <a:p>
+            <a:r>
+              <a:t>(it can't survive losing its one AZ / one database — draws out the whole point of AT3).</a:t>
+            </a:r>
+          </a:p>
+          <a:p>
+            <a:r>
+              <a:t>UoC/AT3 tie: Topic 11 develops the ICTCLD502 concepts examined through AT3 Part A (design) and</a:t>
+            </a:r>
+          </a:p>
+          <a:p>
+            <a:r>
+              <a:t>Part B (implement/simulate); today itself is teach + light activity, not graded.</a:t>
+            </a:r>
+          </a:p>
+        </p:txBody>
+      </p:sp>
+      <p:sp>
+        <p:nvSpPr>
+          <p:cNvPr id="4" name="Slide Number Placeholder 3"/>
+          <p:cNvSpPr>
+            <a:spLocks noGrp="1"/>
+          </p:cNvSpPr>
+          <p:nvPr>
+            <p:ph type="sldNum" idx="5" sz="quarter"/>
+          </p:nvPr>
+        </p:nvSpPr>
+        <p:spPr/>
+      </p:sp>
+    </p:spTree>
+  </p:cSld>
+  <p:clrMapOvr>
+    <a:masterClrMapping/>
+  </p:clrMapOvr>
+</p:notes>
+</file>
+
+<file path=ppt/notesSlides/notesSlide10.xml><?xml version="1.0" encoding="utf-8"?>
+<p:notes xmlns:a="http://schemas.openxmlformats.org/drawingml/2006/main" xmlns:p="http://schemas.openxmlformats.org/presentationml/2006/main" xmlns:r="http://schemas.openxmlformats.org/officeDocument/2006/relationships">
+  <p:cSld>
+    <p:spTree>
+      <p:nvGrpSpPr>
+        <p:cNvPr id="1" name=""/>
+        <p:cNvGrpSpPr/>
+        <p:nvPr/>
+      </p:nvGrpSpPr>
+      <p:grpSpPr>
+        <a:xfrm>
+          <a:off x="0" y="0"/>
+          <a:ext cx="0" cy="0"/>
+          <a:chOff x="0" y="0"/>
+          <a:chExt cx="0" cy="0"/>
+        </a:xfrm>
+      </p:grpSpPr>
+      <p:sp>
+        <p:nvSpPr>
+          <p:cNvPr id="2" name="Slide Image Placeholder 1"/>
+          <p:cNvSpPr>
+            <a:spLocks noGrp="1"/>
+          </p:cNvSpPr>
+          <p:nvPr>
+            <p:ph type="sldImg" idx="2"/>
+          </p:nvPr>
+        </p:nvSpPr>
+        <p:spPr/>
+      </p:sp>
+      <p:sp>
+        <p:nvSpPr>
+          <p:cNvPr id="3" name="Notes Placeholder 2"/>
+          <p:cNvSpPr>
+            <a:spLocks noGrp="1"/>
+          </p:cNvSpPr>
+          <p:nvPr>
+            <p:ph type="body" idx="3" sz="quarter"/>
+          </p:nvPr>
+        </p:nvSpPr>
+        <p:spPr/>
+        <p:txBody>
+          <a:bodyPr/>
+          <a:lstStyle/>
+          <a:p>
+            <a:r>
+              <a:t>Open Section 3 with the myth-buster — the mindset the whole HA toolkit rests on. Short slide, high</a:t>
+            </a:r>
+          </a:p>
+          <a:p>
+            <a:r>
+              <a:t>leverage; give it weight.</a:t>
+            </a:r>
+          </a:p>
+          <a:p>
+            <a:r>
+              <a:t>• First bullet, say it flatly: using the cloud does NOT make you highly available by itself.</a:t>
+            </a:r>
+          </a:p>
+          <a:p>
+            <a:r>
+              <a:t>• Accent line — the real principle: YOU design redundancy — across compute, storage and network —</a:t>
+            </a:r>
+          </a:p>
+          <a:p>
+            <a:r>
+              <a:t>  so no single failure takes the service down. HA is an act of design, not a property of the platform.</a:t>
+            </a:r>
+          </a:p>
+          <a:p>
+            <a:r>
+              <a:t>• Third bullet closes the loop back to Section 2: a single-AZ cloud design has a SPOF just like an</a:t>
+            </a:r>
+          </a:p>
+          <a:p>
+            <a:r>
+              <a:t>  on-prem one. The baseline is the proof.</a:t>
+            </a:r>
+          </a:p>
+          <a:p>
+            <a:r>
+              <a:t>Misconception to pre-empt: "it's on AWS, so it's automatically resilient." No — the cloud gives you</a:t>
+            </a:r>
+          </a:p>
+          <a:p>
+            <a:r>
+              <a:t>the TOOLS for redundancy; whether you're highly available depends on how you design with them.</a:t>
+            </a:r>
+          </a:p>
+          <a:p>
+            <a:r>
+              <a:t>Question to pose: "The baseline runs entirely on AWS — so why isn't it already highly available?"</a:t>
+            </a:r>
+          </a:p>
+          <a:p>
+            <a:r>
+              <a:t>(it's single-AZ; no redundancy was designed in — the platform doesn't add it for you).</a:t>
+            </a:r>
+          </a:p>
+          <a:p>
+            <a:r>
+              <a:t>UoC/AT3 tie: underpins ICTCLD502 element 3 (design for HA); frames the toolkit slide next as the</a:t>
+            </a:r>
+          </a:p>
+          <a:p>
+            <a:r>
+              <a:t>redundancy you deliberately design in.</a:t>
+            </a:r>
+          </a:p>
+        </p:txBody>
+      </p:sp>
+      <p:sp>
+        <p:nvSpPr>
+          <p:cNvPr id="4" name="Slide Number Placeholder 3"/>
+          <p:cNvSpPr>
+            <a:spLocks noGrp="1"/>
+          </p:cNvSpPr>
+          <p:nvPr>
+            <p:ph type="sldNum" idx="5" sz="quarter"/>
+          </p:nvPr>
+        </p:nvSpPr>
+        <p:spPr/>
+      </p:sp>
+    </p:spTree>
+  </p:cSld>
+  <p:clrMapOvr>
+    <a:masterClrMapping/>
+  </p:clrMapOvr>
+</p:notes>
+</file>
+
+<file path=ppt/notesSlides/notesSlide11.xml><?xml version="1.0" encoding="utf-8"?>
+<p:notes xmlns:a="http://schemas.openxmlformats.org/drawingml/2006/main" xmlns:p="http://schemas.openxmlformats.org/presentationml/2006/main" xmlns:r="http://schemas.openxmlformats.org/officeDocument/2006/relationships">
+  <p:cSld>
+    <p:spTree>
+      <p:nvGrpSpPr>
+        <p:cNvPr id="1" name=""/>
+        <p:cNvGrpSpPr/>
+        <p:nvPr/>
+      </p:nvGrpSpPr>
+      <p:grpSpPr>
+        <a:xfrm>
+          <a:off x="0" y="0"/>
+          <a:ext cx="0" cy="0"/>
+          <a:chOff x="0" y="0"/>
+          <a:chExt cx="0" cy="0"/>
+        </a:xfrm>
+      </p:grpSpPr>
+      <p:sp>
+        <p:nvSpPr>
+          <p:cNvPr id="2" name="Slide Image Placeholder 1"/>
+          <p:cNvSpPr>
+            <a:spLocks noGrp="1"/>
+          </p:cNvSpPr>
+          <p:nvPr>
+            <p:ph type="sldImg" idx="2"/>
+          </p:nvPr>
+        </p:nvSpPr>
+        <p:spPr/>
+      </p:sp>
+      <p:sp>
+        <p:nvSpPr>
+          <p:cNvPr id="3" name="Notes Placeholder 2"/>
+          <p:cNvSpPr>
+            <a:spLocks noGrp="1"/>
+          </p:cNvSpPr>
+          <p:nvPr>
+            <p:ph type="body" idx="3" sz="quarter"/>
+          </p:nvPr>
+        </p:nvSpPr>
+        <p:spPr/>
+        <p:txBody>
+          <a:bodyPr/>
+          <a:lstStyle/>
+          <a:p>
+            <a:r>
+              <a:t>The workhorse slide of Section 3 — name the four mechanisms AT3 designs with. Recognition + role</a:t>
+            </a:r>
+          </a:p>
+          <a:p>
+            <a:r>
+              <a:t>for each; the design work is Topic 12, so don't over-drill here.</a:t>
+            </a:r>
+          </a:p>
+          <a:p>
+            <a:r>
+              <a:t>• Multi-AZ — run resources ACROSS Availability Zones so losing one AZ doesn't stop the service.</a:t>
+            </a:r>
+          </a:p>
+          <a:p>
+            <a:r>
+              <a:t>  This is the headline move against the baseline's biggest SPOF.</a:t>
+            </a:r>
+          </a:p>
+          <a:p>
+            <a:r>
+              <a:t>• Load balancing — spread traffic across servers AND route only to HEALTHY ones (health checks are</a:t>
+            </a:r>
+          </a:p>
+          <a:p>
+            <a:r>
+              <a:t>  half the value, not just distribution).</a:t>
+            </a:r>
+          </a:p>
+          <a:p>
+            <a:r>
+              <a:t>• Auto Scaling across AZs — keep healthy CAPACITY in each AZ; frame it as availability, not just</a:t>
+            </a:r>
+          </a:p>
+          <a:p>
+            <a:r>
+              <a:t>  handling load — if an AZ's instances die, the ASG replaces them elsewhere.</a:t>
+            </a:r>
+          </a:p>
+          <a:p>
+            <a:r>
+              <a:t>• Accent line — managed Multi-AZ databases: a SYNCHRONOUS standby with AUTOMATIC failover. And state</a:t>
+            </a:r>
+          </a:p>
+          <a:p>
+            <a:r>
+              <a:t>  the ceiling out loud: Multi-Region / full DR is OUT of scope (that's CL2). CL1 HA = cross-AZ.</a:t>
+            </a:r>
+          </a:p>
+          <a:p>
+            <a:r>
+              <a:t>Misconception to pre-empt: "load balancing and autoscaling are just for handling busy periods." Not</a:t>
+            </a:r>
+          </a:p>
+          <a:p>
+            <a:r>
+              <a:t>only — across AZs they're availability mechanisms: they route around and replace failed capacity.</a:t>
+            </a:r>
+          </a:p>
+          <a:p>
+            <a:r>
+              <a:t>Question to pose: "Match one to the baseline's single-AZ SPOF — which tool removes it?" (Multi-AZ /</a:t>
+            </a:r>
+          </a:p>
+          <a:p>
+            <a:r>
+              <a:t>a second AZ — previews the match activity).</a:t>
+            </a:r>
+          </a:p>
+          <a:p>
+            <a:r>
+              <a:t>UoC/AT3 tie: ICTCLD502 KE 4/7/8 and element 3 underpinning; this is the toolkit AT3 Part A designs with.</a:t>
+            </a:r>
+          </a:p>
+        </p:txBody>
+      </p:sp>
+      <p:sp>
+        <p:nvSpPr>
+          <p:cNvPr id="4" name="Slide Number Placeholder 3"/>
+          <p:cNvSpPr>
+            <a:spLocks noGrp="1"/>
+          </p:cNvSpPr>
+          <p:nvPr>
+            <p:ph type="sldNum" idx="5" sz="quarter"/>
+          </p:nvPr>
+        </p:nvSpPr>
+        <p:spPr/>
+      </p:sp>
+    </p:spTree>
+  </p:cSld>
+  <p:clrMapOvr>
+    <a:masterClrMapping/>
+  </p:clrMapOvr>
+</p:notes>
+</file>
+
+<file path=ppt/notesSlides/notesSlide12.xml><?xml version="1.0" encoding="utf-8"?>
+<p:notes xmlns:a="http://schemas.openxmlformats.org/drawingml/2006/main" xmlns:p="http://schemas.openxmlformats.org/presentationml/2006/main" xmlns:r="http://schemas.openxmlformats.org/officeDocument/2006/relationships">
+  <p:cSld>
+    <p:spTree>
+      <p:nvGrpSpPr>
+        <p:cNvPr id="1" name=""/>
+        <p:cNvGrpSpPr/>
+        <p:nvPr/>
+      </p:nvGrpSpPr>
+      <p:grpSpPr>
+        <a:xfrm>
+          <a:off x="0" y="0"/>
+          <a:ext cx="0" cy="0"/>
+          <a:chOff x="0" y="0"/>
+          <a:chExt cx="0" cy="0"/>
+        </a:xfrm>
+      </p:grpSpPr>
+      <p:sp>
+        <p:nvSpPr>
+          <p:cNvPr id="2" name="Slide Image Placeholder 1"/>
+          <p:cNvSpPr>
+            <a:spLocks noGrp="1"/>
+          </p:cNvSpPr>
+          <p:nvPr>
+            <p:ph type="sldImg" idx="2"/>
+          </p:nvPr>
+        </p:nvSpPr>
+        <p:spPr/>
+      </p:sp>
+      <p:sp>
+        <p:nvSpPr>
+          <p:cNvPr id="3" name="Notes Placeholder 2"/>
+          <p:cNvSpPr>
+            <a:spLocks noGrp="1"/>
+          </p:cNvSpPr>
+          <p:nvPr>
+            <p:ph type="body" idx="3" sz="quarter"/>
+          </p:nvPr>
+        </p:nvSpPr>
+        <p:spPr/>
+        <p:txBody>
+          <a:bodyPr/>
+          <a:lstStyle/>
+          <a:p>
+            <a:r>
+              <a:t>Visual slide — walk the Multi-AZ database diagram; it's the mechanism students find most abstract,</a:t>
+            </a:r>
+          </a:p>
+          <a:p>
+            <a:r>
+              <a:t>so narrate the failover story rather than reading bullets.</a:t>
+            </a:r>
+          </a:p>
+          <a:p>
+            <a:r>
+              <a:t>• Trace the picture: a PRIMARY database in one AZ, a SYNCHRONOUS standby in ANOTHER AZ — every write</a:t>
+            </a:r>
+          </a:p>
+          <a:p>
+            <a:r>
+              <a:t>  is copied to the standby in real time, so the standby is always current.</a:t>
+            </a:r>
+          </a:p>
+          <a:p>
+            <a:r>
+              <a:t>• Second bullet is the payoff: if the primary (or its whole AZ) fails, the standby is PROMOTED</a:t>
+            </a:r>
+          </a:p>
+          <a:p>
+            <a:r>
+              <a:t>  automatically — service continues with SECONDS of downtime, not hours. Automatic is the key word.</a:t>
+            </a:r>
+          </a:p>
+          <a:p>
+            <a:r>
+              <a:t>• Accent line, the detail students miss: the application reaches the database BY NAME (an endpoint),</a:t>
+            </a:r>
+          </a:p>
+          <a:p>
+            <a:r>
+              <a:t>  so failover needs NO app reconfiguration — the name now points at the promoted standby.</a:t>
+            </a:r>
+          </a:p>
+          <a:p>
+            <a:r>
+              <a:t>Misconception to pre-empt: "the standby serves reads / shares the load." No — a Multi-AZ standby is</a:t>
+            </a:r>
+          </a:p>
+          <a:p>
+            <a:r>
+              <a:t>for AVAILABILITY, not scaling; it sits idle until failover. (Read replicas are a different thing.)</a:t>
+            </a:r>
+          </a:p>
+          <a:p>
+            <a:r>
+              <a:t>Question to pose: "The primary AZ dies mid-invoice-run — what does the app have to change to keep</a:t>
+            </a:r>
+          </a:p>
+          <a:p>
+            <a:r>
+              <a:t>working?" (nothing — it connects by name; the endpoint follows the promoted standby).</a:t>
+            </a:r>
+          </a:p>
+          <a:p>
+            <a:r>
+              <a:t>UoC/AT3 tie: ICTCLD502 KE 4/7/8; the Multi-AZ database is the mechanism that removes the baseline's</a:t>
+            </a:r>
+          </a:p>
+          <a:p>
+            <a:r>
+              <a:t>single-database SPOF in the AT3 design.</a:t>
+            </a:r>
+          </a:p>
+        </p:txBody>
+      </p:sp>
+      <p:sp>
+        <p:nvSpPr>
+          <p:cNvPr id="4" name="Slide Number Placeholder 3"/>
+          <p:cNvSpPr>
+            <a:spLocks noGrp="1"/>
+          </p:cNvSpPr>
+          <p:nvPr>
+            <p:ph type="sldNum" idx="5" sz="quarter"/>
+          </p:nvPr>
+        </p:nvSpPr>
+        <p:spPr/>
+      </p:sp>
+    </p:spTree>
+  </p:cSld>
+  <p:clrMapOvr>
+    <a:masterClrMapping/>
+  </p:clrMapOvr>
+</p:notes>
+</file>
+
+<file path=ppt/notesSlides/notesSlide13.xml><?xml version="1.0" encoding="utf-8"?>
+<p:notes xmlns:a="http://schemas.openxmlformats.org/drawingml/2006/main" xmlns:p="http://schemas.openxmlformats.org/presentationml/2006/main" xmlns:r="http://schemas.openxmlformats.org/officeDocument/2006/relationships">
+  <p:cSld>
+    <p:spTree>
+      <p:nvGrpSpPr>
+        <p:cNvPr id="1" name=""/>
+        <p:cNvGrpSpPr/>
+        <p:nvPr/>
+      </p:nvGrpSpPr>
+      <p:grpSpPr>
+        <a:xfrm>
+          <a:off x="0" y="0"/>
+          <a:ext cx="0" cy="0"/>
+          <a:chOff x="0" y="0"/>
+          <a:chExt cx="0" cy="0"/>
+        </a:xfrm>
+      </p:grpSpPr>
+      <p:sp>
+        <p:nvSpPr>
+          <p:cNvPr id="2" name="Slide Image Placeholder 1"/>
+          <p:cNvSpPr>
+            <a:spLocks noGrp="1"/>
+          </p:cNvSpPr>
+          <p:nvPr>
+            <p:ph type="sldImg" idx="2"/>
+          </p:nvPr>
+        </p:nvSpPr>
+        <p:spPr/>
+      </p:sp>
+      <p:sp>
+        <p:nvSpPr>
+          <p:cNvPr id="3" name="Notes Placeholder 2"/>
+          <p:cNvSpPr>
+            <a:spLocks noGrp="1"/>
+          </p:cNvSpPr>
+          <p:nvPr>
+            <p:ph type="body" idx="3" sz="quarter"/>
+          </p:nvPr>
+        </p:nvSpPr>
+        <p:spPr/>
+        <p:txBody>
+          <a:bodyPr/>
+          <a:lstStyle/>
+          <a:p>
+            <a:r>
+              <a:t>Facilitation — the Section 3 practice, and the shape of the Topic 12 design in miniature. Students</a:t>
+            </a:r>
+          </a:p>
+          <a:p>
+            <a:r>
+              <a:t>pair each baseline SPOF from the earlier activity with its cloud fix. Have their SPOF list to hand.</a:t>
+            </a:r>
+          </a:p>
+          <a:p>
+            <a:r>
+              <a:t>Tell students: "For each single point of failure you found in the baseline, name the ONE cloud</a:t>
+            </a:r>
+          </a:p>
+          <a:p>
+            <a:r>
+              <a:t>mechanism that removes it. This is exactly the design you'll produce in full in Topic 12."</a:t>
+            </a:r>
+          </a:p>
+          <a:p>
+            <a:r>
+              <a:t>Steps (put up):</a:t>
+            </a:r>
+          </a:p>
+          <a:p>
+            <a:r>
+              <a:t>1. Work the four: single AZ → ?  ·  single database → ?  ·  single running instance → ?  ·  single</a:t>
+            </a:r>
+          </a:p>
+          <a:p>
+            <a:r>
+              <a:t>   NAT gateway → ?</a:t>
+            </a:r>
+          </a:p>
+          <a:p>
+            <a:r>
+              <a:t>2. For each, say WHY that mechanism removes the SPOF (not just the label).</a:t>
+            </a:r>
+          </a:p>
+          <a:p>
+            <a:r>
+              <a:t>Answers to reveal: a second AZ · a Multi-AZ database · an ASG across AZs · a NAT gateway per AZ.</a:t>
+            </a:r>
+          </a:p>
+          <a:p>
+            <a:r>
+              <a:t>Must produce: four matched SPOF→mechanism pairs, each with a one-line why.</a:t>
+            </a:r>
+          </a:p>
+          <a:p>
+            <a:r>
+              <a:t>Timing: ~10 min then reveal. Where they get stuck: the NAT gateway (they forget egress is a SPOF</a:t>
+            </a:r>
+          </a:p>
+          <a:p>
+            <a:r>
+              <a:t>too) and conflating "ASG for load" with "ASG for availability" — clarify it's per-AZ healthy capacity.</a:t>
+            </a:r>
+          </a:p>
+          <a:p>
+            <a:r>
+              <a:t>Share-back prompt: read a SPOF, take the mechanism from the room, confirm the reasoning — then note</a:t>
+            </a:r>
+          </a:p>
+          <a:p>
+            <a:r>
+              <a:t>that stitched together, these four ARE the HA design they build in Topic 12.</a:t>
+            </a:r>
+          </a:p>
+          <a:p>
+            <a:r>
+              <a:t>No-leakage note: practice on the Accounting baseline; AT3 assesses this design skill on the LMS</a:t>
+            </a:r>
+          </a:p>
+          <a:p>
+            <a:r>
+              <a:t>system — comparable, not identical. Keep them on Ledgerline here.</a:t>
+            </a:r>
+          </a:p>
+        </p:txBody>
+      </p:sp>
+      <p:sp>
+        <p:nvSpPr>
+          <p:cNvPr id="4" name="Slide Number Placeholder 3"/>
+          <p:cNvSpPr>
+            <a:spLocks noGrp="1"/>
+          </p:cNvSpPr>
+          <p:nvPr>
+            <p:ph type="sldNum" idx="5" sz="quarter"/>
+          </p:nvPr>
+        </p:nvSpPr>
+        <p:spPr/>
+      </p:sp>
+    </p:spTree>
+  </p:cSld>
+  <p:clrMapOvr>
+    <a:masterClrMapping/>
+  </p:clrMapOvr>
+</p:notes>
+</file>
+
+<file path=ppt/notesSlides/notesSlide2.xml><?xml version="1.0" encoding="utf-8"?>
+<p:notes xmlns:a="http://schemas.openxmlformats.org/drawingml/2006/main" xmlns:p="http://schemas.openxmlformats.org/presentationml/2006/main" xmlns:r="http://schemas.openxmlformats.org/officeDocument/2006/relationships">
+  <p:cSld>
+    <p:spTree>
+      <p:nvGrpSpPr>
+        <p:cNvPr id="1" name=""/>
+        <p:cNvGrpSpPr/>
+        <p:nvPr/>
+      </p:nvGrpSpPr>
+      <p:grpSpPr>
+        <a:xfrm>
+          <a:off x="0" y="0"/>
+          <a:ext cx="0" cy="0"/>
+          <a:chOff x="0" y="0"/>
+          <a:chExt cx="0" cy="0"/>
+        </a:xfrm>
+      </p:grpSpPr>
+      <p:sp>
+        <p:nvSpPr>
+          <p:cNvPr id="2" name="Slide Image Placeholder 1"/>
+          <p:cNvSpPr>
+            <a:spLocks noGrp="1"/>
+          </p:cNvSpPr>
+          <p:nvPr>
+            <p:ph type="sldImg" idx="2"/>
+          </p:nvPr>
+        </p:nvSpPr>
+        <p:spPr/>
+      </p:sp>
+      <p:sp>
+        <p:nvSpPr>
+          <p:cNvPr id="3" name="Notes Placeholder 2"/>
+          <p:cNvSpPr>
+            <a:spLocks noGrp="1"/>
+          </p:cNvSpPr>
+          <p:nvPr>
+            <p:ph type="body" idx="3" sz="quarter"/>
+          </p:nvPr>
+        </p:nvSpPr>
+        <p:spPr/>
+        <p:txBody>
+          <a:bodyPr/>
+          <a:lstStyle/>
+          <a:p>
+            <a:r>
+              <a:t>The anchor definition of Section 1 — teach it deliberately; students must be able to reason with</a:t>
+            </a:r>
+          </a:p>
+          <a:p>
+            <a:r>
+              <a:t>the % ↔ downtime mapping in the AT3 design.</a:t>
+            </a:r>
+          </a:p>
+          <a:p>
+            <a:r>
+              <a:t>• Read the bolded definition: HA = a system stays operational and accessible with MINIMAL</a:t>
+            </a:r>
+          </a:p>
+          <a:p>
+            <a:r>
+              <a:t>  downtime, even when parts fail. Stress "even when parts fail" — HA assumes failure happens.</a:t>
+            </a:r>
+          </a:p>
+          <a:p>
+            <a:r>
+              <a:t>• Make the numbers concrete: availability is a percentage that maps to real downtime — 99% ≈ 7</a:t>
+            </a:r>
+          </a:p>
+          <a:p>
+            <a:r>
+              <a:t>  hours/month offline; 99.999% ("five nines") ≈ 26 seconds/month. Let that gap land.</a:t>
+            </a:r>
+          </a:p>
+          <a:p>
+            <a:r>
+              <a:t>• Third bullet (accent): more nines cost a LOT more — often 2-5× — and aren't always achievable.</a:t>
+            </a:r>
+          </a:p>
+          <a:p>
+            <a:r>
+              <a:t>  This is the hinge for the "YAT's target" slide: you buy only the availability you need.</a:t>
+            </a:r>
+          </a:p>
+          <a:p>
+            <a:r>
+              <a:t>Misconception to pre-empt: "highly available means never goes down." No — it means minimal,</a:t>
+            </a:r>
+          </a:p>
+          <a:p>
+            <a:r>
+              <a:t>tolerable downtime; even five-nines is ~26 seconds a month, not zero.</a:t>
+            </a:r>
+          </a:p>
+          <a:p>
+            <a:r>
+              <a:t>Question to pose: "If 99% sounds great, why might 7 hours offline a month be unacceptable for a</a:t>
+            </a:r>
+          </a:p>
+          <a:p>
+            <a:r>
+              <a:t>payroll run — and what does closing that gap cost?" (surfaces the cost-of-nines trade-off).</a:t>
+            </a:r>
+          </a:p>
+          <a:p>
+            <a:r>
+              <a:t>UoC/AT3 tie: ICTCLD502 PC 1.1 (reliability/recoverability/service levels) and KE 4/7/8; this</a:t>
+            </a:r>
+          </a:p>
+          <a:p>
+            <a:r>
+              <a:t>vocabulary is what AT3 Part A uses to STATE the HA requirement.</a:t>
+            </a:r>
+          </a:p>
+        </p:txBody>
+      </p:sp>
+      <p:sp>
+        <p:nvSpPr>
+          <p:cNvPr id="4" name="Slide Number Placeholder 3"/>
+          <p:cNvSpPr>
+            <a:spLocks noGrp="1"/>
+          </p:cNvSpPr>
+          <p:nvPr>
+            <p:ph type="sldNum" idx="5" sz="quarter"/>
+          </p:nvPr>
+        </p:nvSpPr>
+        <p:spPr/>
+      </p:sp>
+    </p:spTree>
+  </p:cSld>
+  <p:clrMapOvr>
+    <a:masterClrMapping/>
+  </p:clrMapOvr>
+</p:notes>
+</file>
+
+<file path=ppt/notesSlides/notesSlide3.xml><?xml version="1.0" encoding="utf-8"?>
+<p:notes xmlns:a="http://schemas.openxmlformats.org/drawingml/2006/main" xmlns:p="http://schemas.openxmlformats.org/presentationml/2006/main" xmlns:r="http://schemas.openxmlformats.org/officeDocument/2006/relationships">
+  <p:cSld>
+    <p:spTree>
+      <p:nvGrpSpPr>
+        <p:cNvPr id="1" name=""/>
+        <p:cNvGrpSpPr/>
+        <p:nvPr/>
+      </p:nvGrpSpPr>
+      <p:grpSpPr>
+        <a:xfrm>
+          <a:off x="0" y="0"/>
+          <a:ext cx="0" cy="0"/>
+          <a:chOff x="0" y="0"/>
+          <a:chExt cx="0" cy="0"/>
+        </a:xfrm>
+      </p:grpSpPr>
+      <p:sp>
+        <p:nvSpPr>
+          <p:cNvPr id="2" name="Slide Image Placeholder 1"/>
+          <p:cNvSpPr>
+            <a:spLocks noGrp="1"/>
+          </p:cNvSpPr>
+          <p:nvPr>
+            <p:ph type="sldImg" idx="2"/>
+          </p:nvPr>
+        </p:nvSpPr>
+        <p:spPr/>
+      </p:sp>
+      <p:sp>
+        <p:nvSpPr>
+          <p:cNvPr id="3" name="Notes Placeholder 2"/>
+          <p:cNvSpPr>
+            <a:spLocks noGrp="1"/>
+          </p:cNvSpPr>
+          <p:nvPr>
+            <p:ph type="body" idx="3" sz="quarter"/>
+          </p:nvPr>
+        </p:nvSpPr>
+        <p:spPr/>
+        <p:txBody>
+          <a:bodyPr/>
+          <a:lstStyle/>
+          <a:p>
+            <a:r>
+              <a:t>Draw the reliability-vs-availability distinction cleanly — students routinely collapse the two,</a:t>
+            </a:r>
+          </a:p>
+          <a:p>
+            <a:r>
+              <a:t>and AT3 asks them to state service levels precisely.</a:t>
+            </a:r>
+          </a:p>
+          <a:p>
+            <a:r>
+              <a:t>• Reliability = how CONSISTENTLY a service works CORRECTLY; availability only says it's online.</a:t>
+            </a:r>
+          </a:p>
+          <a:p>
+            <a:r>
+              <a:t>  A service can be up (available) yet returning errors (unreliable) — different properties.</a:t>
+            </a:r>
+          </a:p>
+          <a:p>
+            <a:r>
+              <a:t>• A service level is a measurable performance TARGET — availability %, response time. Name it as</a:t>
+            </a:r>
+          </a:p>
+          <a:p>
+            <a:r>
+              <a:t>  the number you promise.</a:t>
+            </a:r>
+          </a:p>
+          <a:p>
+            <a:r>
+              <a:t>• Third bullet (accent): a Service Level Agreement (SLA) sets the MINIMUM service level; miss it</a:t>
+            </a:r>
+          </a:p>
+          <a:p>
+            <a:r>
+              <a:t>  and credits/penalties apply. The SLA is the contract that makes the target real.</a:t>
+            </a:r>
+          </a:p>
+          <a:p>
+            <a:r>
+              <a:t>Misconception to pre-empt: "available and reliable are the same thing." No — online ≠ working</a:t>
+            </a:r>
+          </a:p>
+          <a:p>
+            <a:r>
+              <a:t>correctly; you can be highly available and still unreliable if it errors while up.</a:t>
+            </a:r>
+          </a:p>
+          <a:p>
+            <a:r>
+              <a:t>Question to pose: "If Ledgerline is up but the report screen throws errors half the time, is that</a:t>
+            </a:r>
+          </a:p>
+          <a:p>
+            <a:r>
+              <a:t>an availability problem or a reliability problem?" (reliability — sharpens the distinction).</a:t>
+            </a:r>
+          </a:p>
+          <a:p>
+            <a:r>
+              <a:t>UoC/AT3 tie: ICTCLD502 PC 1.1 / KE; stating reliability, recoverability and service levels is</a:t>
+            </a:r>
+          </a:p>
+          <a:p>
+            <a:r>
+              <a:t>exactly what AT3 Part A's "identify HA requirements" step evidences.</a:t>
+            </a:r>
+          </a:p>
+        </p:txBody>
+      </p:sp>
+      <p:sp>
+        <p:nvSpPr>
+          <p:cNvPr id="4" name="Slide Number Placeholder 3"/>
+          <p:cNvSpPr>
+            <a:spLocks noGrp="1"/>
+          </p:cNvSpPr>
+          <p:nvPr>
+            <p:ph type="sldNum" idx="5" sz="quarter"/>
+          </p:nvPr>
+        </p:nvSpPr>
+        <p:spPr/>
+      </p:sp>
+    </p:spTree>
+  </p:cSld>
+  <p:clrMapOvr>
+    <a:masterClrMapping/>
+  </p:clrMapOvr>
+</p:notes>
+</file>
+
+<file path=ppt/notesSlides/notesSlide4.xml><?xml version="1.0" encoding="utf-8"?>
+<p:notes xmlns:a="http://schemas.openxmlformats.org/drawingml/2006/main" xmlns:p="http://schemas.openxmlformats.org/presentationml/2006/main" xmlns:r="http://schemas.openxmlformats.org/officeDocument/2006/relationships">
+  <p:cSld>
+    <p:spTree>
+      <p:nvGrpSpPr>
+        <p:cNvPr id="1" name=""/>
+        <p:cNvGrpSpPr/>
+        <p:nvPr/>
+      </p:nvGrpSpPr>
+      <p:grpSpPr>
+        <a:xfrm>
+          <a:off x="0" y="0"/>
+          <a:ext cx="0" cy="0"/>
+          <a:chOff x="0" y="0"/>
+          <a:chExt cx="0" cy="0"/>
+        </a:xfrm>
+      </p:grpSpPr>
+      <p:sp>
+        <p:nvSpPr>
+          <p:cNvPr id="2" name="Slide Image Placeholder 1"/>
+          <p:cNvSpPr>
+            <a:spLocks noGrp="1"/>
+          </p:cNvSpPr>
+          <p:nvPr>
+            <p:ph type="sldImg" idx="2"/>
+          </p:nvPr>
+        </p:nvSpPr>
+        <p:spPr/>
+      </p:sp>
+      <p:sp>
+        <p:nvSpPr>
+          <p:cNvPr id="3" name="Notes Placeholder 2"/>
+          <p:cNvSpPr>
+            <a:spLocks noGrp="1"/>
+          </p:cNvSpPr>
+          <p:nvPr>
+            <p:ph type="body" idx="3" sz="quarter"/>
+          </p:nvPr>
+        </p:nvSpPr>
+        <p:spPr/>
+        <p:txBody>
+          <a:bodyPr/>
+          <a:lstStyle/>
+          <a:p>
+            <a:r>
+              <a:t>Apply the concept to the actual client — this is where "how many nines?" becomes a real design</a:t>
+            </a:r>
+          </a:p>
+          <a:p>
+            <a:r>
+              <a:t>decision, not trivia.</a:t>
+            </a:r>
+          </a:p>
+          <a:p>
+            <a:r>
+              <a:t>• Walk the requirement: Ledgerline needs ≥ 99.5% availability in BUSINESS HOURS (Mon-Fri</a:t>
+            </a:r>
+          </a:p>
+          <a:p>
+            <a:r>
+              <a:t>  ~07:30-18:00) — there is NO 24/7 requirement. The workload shape sets the target.</a:t>
+            </a:r>
+          </a:p>
+          <a:p>
+            <a:r>
+              <a:t>• The accent line is the design goal: survive the loss of an Availability Zone — NOT chase</a:t>
+            </a:r>
+          </a:p>
+          <a:p>
+            <a:r>
+              <a:t>  99.999%. HA here means AZ resilience, sized to the business.</a:t>
+            </a:r>
+          </a:p>
+          <a:p>
+            <a:r>
+              <a:t>• Third bullet: five-nines would MULTIPLY the cost (callback to the 2-5× line) for resilience a</a:t>
+            </a:r>
+          </a:p>
+          <a:p>
+            <a:r>
+              <a:t>  business-hours workload simply doesn't need. Right-sizing availability is the consultant skill.</a:t>
+            </a:r>
+          </a:p>
+          <a:p>
+            <a:r>
+              <a:t>Misconception to pre-empt: "more availability is always better, so aim for five-nines." No — you</a:t>
+            </a:r>
+          </a:p>
+          <a:p>
+            <a:r>
+              <a:t>buy the availability the business needs; over-buying wastes money on downtime nobody would notice.</a:t>
+            </a:r>
+          </a:p>
+          <a:p>
+            <a:r>
+              <a:t>Question to pose: "Ledgerline is idle overnight and on weekends — how does that change what</a:t>
+            </a:r>
+          </a:p>
+          <a:p>
+            <a:r>
+              <a:t>availability target is worth paying for?" (business-hours target, AZ resilience, not 24/7 five-nines).</a:t>
+            </a:r>
+          </a:p>
+          <a:p>
+            <a:r>
+              <a:t>UoC/AT3 tie: ICTCLD502 PC 1.1/1.2 (reliability/service levels + infrastructure to business needs);</a:t>
+            </a:r>
+          </a:p>
+          <a:p>
+            <a:r>
+              <a:t>this target is the requirement AT3 Part A designs against.</a:t>
+            </a:r>
+          </a:p>
+        </p:txBody>
+      </p:sp>
+      <p:sp>
+        <p:nvSpPr>
+          <p:cNvPr id="4" name="Slide Number Placeholder 3"/>
+          <p:cNvSpPr>
+            <a:spLocks noGrp="1"/>
+          </p:cNvSpPr>
+          <p:nvPr>
+            <p:ph type="sldNum" idx="5" sz="quarter"/>
+          </p:nvPr>
+        </p:nvSpPr>
+        <p:spPr/>
+      </p:sp>
+    </p:spTree>
+  </p:cSld>
+  <p:clrMapOvr>
+    <a:masterClrMapping/>
+  </p:clrMapOvr>
+</p:notes>
+</file>
+
+<file path=ppt/notesSlides/notesSlide5.xml><?xml version="1.0" encoding="utf-8"?>
+<p:notes xmlns:a="http://schemas.openxmlformats.org/drawingml/2006/main" xmlns:p="http://schemas.openxmlformats.org/presentationml/2006/main" xmlns:r="http://schemas.openxmlformats.org/officeDocument/2006/relationships">
+  <p:cSld>
+    <p:spTree>
+      <p:nvGrpSpPr>
+        <p:cNvPr id="1" name=""/>
+        <p:cNvGrpSpPr/>
+        <p:nvPr/>
+      </p:nvGrpSpPr>
+      <p:grpSpPr>
+        <a:xfrm>
+          <a:off x="0" y="0"/>
+          <a:ext cx="0" cy="0"/>
+          <a:chOff x="0" y="0"/>
+          <a:chExt cx="0" cy="0"/>
+        </a:xfrm>
+      </p:grpSpPr>
+      <p:sp>
+        <p:nvSpPr>
+          <p:cNvPr id="2" name="Slide Image Placeholder 1"/>
+          <p:cNvSpPr>
+            <a:spLocks noGrp="1"/>
+          </p:cNvSpPr>
+          <p:nvPr>
+            <p:ph type="sldImg" idx="2"/>
+          </p:nvPr>
+        </p:nvSpPr>
+        <p:spPr/>
+      </p:sp>
+      <p:sp>
+        <p:nvSpPr>
+          <p:cNvPr id="3" name="Notes Placeholder 2"/>
+          <p:cNvSpPr>
+            <a:spLocks noGrp="1"/>
+          </p:cNvSpPr>
+          <p:nvPr>
+            <p:ph type="body" idx="3" sz="quarter"/>
+          </p:nvPr>
+        </p:nvSpPr>
+        <p:spPr/>
+        <p:txBody>
+          <a:bodyPr/>
+          <a:lstStyle/>
+          <a:p>
+            <a:r>
+              <a:t>Facilitation — a short paired discussion, the Section 1 practice. Light and verbal; no writing</a:t>
+            </a:r>
+          </a:p>
+          <a:p>
+            <a:r>
+              <a:t>needed. Circulate and listen for the cost-of-nines reasoning.</a:t>
+            </a:r>
+          </a:p>
+          <a:p>
+            <a:r>
+              <a:t>Tell students: "You're the MTS consultant advising YAT. Talk to the person next to you and be</a:t>
+            </a:r>
+          </a:p>
+          <a:p>
+            <a:r>
+              <a:t>ready to justify the availability target for THIS client — not a textbook answer."</a:t>
+            </a:r>
+          </a:p>
+          <a:p>
+            <a:r>
+              <a:t>Prompts (put on the board):</a:t>
+            </a:r>
+          </a:p>
+          <a:p>
+            <a:r>
+              <a:t>1. Why does 99.5% business-hours fit Ledgerline — and what downtime does that actually allow?</a:t>
+            </a:r>
+          </a:p>
+          <a:p>
+            <a:r>
+              <a:t>2. When would chasing five-nines be the WRONG call for a client like YAT, and why?</a:t>
+            </a:r>
+          </a:p>
+          <a:p>
+            <a:r>
+              <a:t>Must produce: a spoken justification each pair can defend — a target tied to YAT's business hours</a:t>
+            </a:r>
+          </a:p>
+          <a:p>
+            <a:r>
+              <a:t>plus the cost trade-off (not "more nines is better").</a:t>
+            </a:r>
+          </a:p>
+          <a:p>
+            <a:r>
+              <a:t>Timing: ~5 min then share. Where they get stuck: they reach for the highest number by reflex —</a:t>
+            </a:r>
+          </a:p>
+          <a:p>
+            <a:r>
+              <a:t>redirect them to what the BUSINESS needs (business hours only) and what extra nines cost.</a:t>
+            </a:r>
+          </a:p>
+          <a:p>
+            <a:r>
+              <a:t>Share-back prompt: take one pair who defended 99.5% and one who over-shot, and let the room weigh</a:t>
+            </a:r>
+          </a:p>
+          <a:p>
+            <a:r>
+              <a:t>which is the more client-specific call.</a:t>
+            </a:r>
+          </a:p>
+          <a:p>
+            <a:r>
+              <a:t>No-leakage note: this is practice reasoning on Ledgerline; AT3 assesses the same skill on the LMS</a:t>
+            </a:r>
+          </a:p>
+          <a:p>
+            <a:r>
+              <a:t>system — comparable, not identical. Keep them anchored to the Accounting baseline here.</a:t>
+            </a:r>
+          </a:p>
+        </p:txBody>
+      </p:sp>
+      <p:sp>
+        <p:nvSpPr>
+          <p:cNvPr id="4" name="Slide Number Placeholder 3"/>
+          <p:cNvSpPr>
+            <a:spLocks noGrp="1"/>
+          </p:cNvSpPr>
+          <p:nvPr>
+            <p:ph type="sldNum" idx="5" sz="quarter"/>
+          </p:nvPr>
+        </p:nvSpPr>
+        <p:spPr/>
+      </p:sp>
+    </p:spTree>
+  </p:cSld>
+  <p:clrMapOvr>
+    <a:masterClrMapping/>
+  </p:clrMapOvr>
+</p:notes>
+</file>
+
+<file path=ppt/notesSlides/notesSlide6.xml><?xml version="1.0" encoding="utf-8"?>
+<p:notes xmlns:a="http://schemas.openxmlformats.org/drawingml/2006/main" xmlns:p="http://schemas.openxmlformats.org/presentationml/2006/main" xmlns:r="http://schemas.openxmlformats.org/officeDocument/2006/relationships">
+  <p:cSld>
+    <p:spTree>
+      <p:nvGrpSpPr>
+        <p:cNvPr id="1" name=""/>
+        <p:cNvGrpSpPr/>
+        <p:nvPr/>
+      </p:nvGrpSpPr>
+      <p:grpSpPr>
+        <a:xfrm>
+          <a:off x="0" y="0"/>
+          <a:ext cx="0" cy="0"/>
+          <a:chOff x="0" y="0"/>
+          <a:chExt cx="0" cy="0"/>
+        </a:xfrm>
+      </p:grpSpPr>
+      <p:sp>
+        <p:nvSpPr>
+          <p:cNvPr id="2" name="Slide Image Placeholder 1"/>
+          <p:cNvSpPr>
+            <a:spLocks noGrp="1"/>
+          </p:cNvSpPr>
+          <p:nvPr>
+            <p:ph type="sldImg" idx="2"/>
+          </p:nvPr>
+        </p:nvSpPr>
+        <p:spPr/>
+      </p:sp>
+      <p:sp>
+        <p:nvSpPr>
+          <p:cNvPr id="3" name="Notes Placeholder 2"/>
+          <p:cNvSpPr>
+            <a:spLocks noGrp="1"/>
+          </p:cNvSpPr>
+          <p:nvPr>
+            <p:ph type="body" idx="3" sz="quarter"/>
+          </p:nvPr>
+        </p:nvSpPr>
+        <p:spPr/>
+        <p:txBody>
+          <a:bodyPr/>
+          <a:lstStyle/>
+          <a:p>
+            <a:r>
+              <a:t>Open Section 2 with the SPOF primer — the single idea the whole availability argument turns on.</a:t>
+            </a:r>
+          </a:p>
+          <a:p>
+            <a:r>
+              <a:t>Teach it plainly before applying it to the baseline.</a:t>
+            </a:r>
+          </a:p>
+          <a:p>
+            <a:r>
+              <a:t>• Definition: a single point of failure (SPOF) is any component whose failure stops the WHOLE</a:t>
+            </a:r>
+          </a:p>
+          <a:p>
+            <a:r>
+              <a:t>  service. One weak link and everything downstream is down.</a:t>
+            </a:r>
+          </a:p>
+          <a:p>
+            <a:r>
+              <a:t>• Use the everyday analogy: a car's engine — one failure and nothing moves, however good the rest</a:t>
+            </a:r>
+          </a:p>
+          <a:p>
+            <a:r>
+              <a:t>  of the car is. That's a SPOF.</a:t>
+            </a:r>
+          </a:p>
+          <a:p>
+            <a:r>
+              <a:t>• Third bullet (accent) makes it IT-concrete: many app servers all on ONE database; a whole office</a:t>
+            </a:r>
+          </a:p>
+          <a:p>
+            <a:r>
+              <a:t>  on ONE internet link; one server; one Availability Zone. Each is a single failure that stops it all.</a:t>
+            </a:r>
+          </a:p>
+          <a:p>
+            <a:r>
+              <a:t>Misconception to pre-empt: "if I have several servers I have no SPOF." Not necessarily — several</a:t>
+            </a:r>
+          </a:p>
+          <a:p>
+            <a:r>
+              <a:t>app servers sharing ONE database still have a SPOF; redundancy at one tier doesn't remove it at another.</a:t>
+            </a:r>
+          </a:p>
+          <a:p>
+            <a:r>
+              <a:t>Question to pose: "Point at the single-AZ baseline — which one failure takes ALL of Ledgerline</a:t>
+            </a:r>
+          </a:p>
+          <a:p>
+            <a:r>
+              <a:t>down?" (the single AZ, or the single database — previews the activity).</a:t>
+            </a:r>
+          </a:p>
+          <a:p>
+            <a:r>
+              <a:t>UoC/AT3 tie: ICTCLD502 PC 2.2 (identify single points of failure — concept here, applied to the</a:t>
+            </a:r>
+          </a:p>
+          <a:p>
+            <a:r>
+              <a:t>baseline in Topic 12) and KE 4/7/8.</a:t>
+            </a:r>
+          </a:p>
+        </p:txBody>
+      </p:sp>
+      <p:sp>
+        <p:nvSpPr>
+          <p:cNvPr id="4" name="Slide Number Placeholder 3"/>
+          <p:cNvSpPr>
+            <a:spLocks noGrp="1"/>
+          </p:cNvSpPr>
+          <p:nvPr>
+            <p:ph type="sldNum" idx="5" sz="quarter"/>
+          </p:nvPr>
+        </p:nvSpPr>
+        <p:spPr/>
+      </p:sp>
+    </p:spTree>
+  </p:cSld>
+  <p:clrMapOvr>
+    <a:masterClrMapping/>
+  </p:clrMapOvr>
+</p:notes>
+</file>
+
+<file path=ppt/notesSlides/notesSlide7.xml><?xml version="1.0" encoding="utf-8"?>
+<p:notes xmlns:a="http://schemas.openxmlformats.org/drawingml/2006/main" xmlns:p="http://schemas.openxmlformats.org/presentationml/2006/main" xmlns:r="http://schemas.openxmlformats.org/officeDocument/2006/relationships">
+  <p:cSld>
+    <p:spTree>
+      <p:nvGrpSpPr>
+        <p:cNvPr id="1" name=""/>
+        <p:cNvGrpSpPr/>
+        <p:nvPr/>
+      </p:nvGrpSpPr>
+      <p:grpSpPr>
+        <a:xfrm>
+          <a:off x="0" y="0"/>
+          <a:ext cx="0" cy="0"/>
+          <a:chOff x="0" y="0"/>
+          <a:chExt cx="0" cy="0"/>
+        </a:xfrm>
+      </p:grpSpPr>
+      <p:sp>
+        <p:nvSpPr>
+          <p:cNvPr id="2" name="Slide Image Placeholder 1"/>
+          <p:cNvSpPr>
+            <a:spLocks noGrp="1"/>
+          </p:cNvSpPr>
+          <p:nvPr>
+            <p:ph type="sldImg" idx="2"/>
+          </p:nvPr>
+        </p:nvSpPr>
+        <p:spPr/>
+      </p:sp>
+      <p:sp>
+        <p:nvSpPr>
+          <p:cNvPr id="3" name="Notes Placeholder 2"/>
+          <p:cNvSpPr>
+            <a:spLocks noGrp="1"/>
+          </p:cNvSpPr>
+          <p:nvPr>
+            <p:ph type="body" idx="3" sz="quarter"/>
+          </p:nvPr>
+        </p:nvSpPr>
+        <p:spPr/>
+        <p:txBody>
+          <a:bodyPr/>
+          <a:lstStyle/>
+          <a:p>
+            <a:r>
+              <a:t>Teach the two recovery objectives precisely — students swap them constantly, and AT3 asks them to</a:t>
+            </a:r>
+          </a:p>
+          <a:p>
+            <a:r>
+              <a:t>ESTIMATE both. Slow down and make each stick.</a:t>
+            </a:r>
+          </a:p>
+          <a:p>
+            <a:r>
+              <a:t>• RTO (Recovery Time Objective) = the maximum DOWNTIME the business will tolerate — how long to get</a:t>
+            </a:r>
+          </a:p>
+          <a:p>
+            <a:r>
+              <a:t>  back up. Think TIME.</a:t>
+            </a:r>
+          </a:p>
+          <a:p>
+            <a:r>
+              <a:t>• RPO (Recovery Point Objective) = the maximum DATA LOSS the business will tolerate — how far back</a:t>
+            </a:r>
+          </a:p>
+          <a:p>
+            <a:r>
+              <a:t>  your last good copy is. Think DATA.</a:t>
+            </a:r>
+          </a:p>
+          <a:p>
+            <a:r>
+              <a:t>• Work the accent example live: backups every 15 min → RPO 15 min; recover three layers at 30 min</a:t>
+            </a:r>
+          </a:p>
+          <a:p>
+            <a:r>
+              <a:t>  each + 1 h testing → RTO 2.5 h. Doing the arithmetic out loud is what makes it concrete.</a:t>
+            </a:r>
+          </a:p>
+          <a:p>
+            <a:r>
+              <a:t>• Last bullet: why not set both to zero? COST — zero loss / zero downtime is extremely expensive;</a:t>
+            </a:r>
+          </a:p>
+          <a:p>
+            <a:r>
+              <a:t>  you set objectives the business can afford (echoes the cost-of-nines theme).</a:t>
+            </a:r>
+          </a:p>
+          <a:p>
+            <a:r>
+              <a:t>Misconception to pre-empt: RTO and RPO are the same, or "RPO is about time." No — RPO is measured</a:t>
+            </a:r>
+          </a:p>
+          <a:p>
+            <a:r>
+              <a:t>in data (how much you'd lose); RTO is measured in time (how long you're down). Anchor: Point vs Time.</a:t>
+            </a:r>
+          </a:p>
+          <a:p>
+            <a:r>
+              <a:t>Question to pose: "If YAT backs up nightly, how much accounting data could a mid-afternoon crash</a:t>
+            </a:r>
+          </a:p>
+          <a:p>
+            <a:r>
+              <a:t>lose — and is that RPO or RTO?" (up to a day's data → RPO; forces the distinction).</a:t>
+            </a:r>
+          </a:p>
+          <a:p>
+            <a:r>
+              <a:t>UoC/AT3 tie: ICTCLD502 PC 2.3 (estimate recovery objectives) — concept here; students estimate the</a:t>
+            </a:r>
+          </a:p>
+          <a:p>
+            <a:r>
+              <a:t>baseline's RPO/RTO in Topic 12.</a:t>
+            </a:r>
+          </a:p>
+        </p:txBody>
+      </p:sp>
+      <p:sp>
+        <p:nvSpPr>
+          <p:cNvPr id="4" name="Slide Number Placeholder 3"/>
+          <p:cNvSpPr>
+            <a:spLocks noGrp="1"/>
+          </p:cNvSpPr>
+          <p:nvPr>
+            <p:ph type="sldNum" idx="5" sz="quarter"/>
+          </p:nvPr>
+        </p:nvSpPr>
+        <p:spPr/>
+      </p:sp>
+    </p:spTree>
+  </p:cSld>
+  <p:clrMapOvr>
+    <a:masterClrMapping/>
+  </p:clrMapOvr>
+</p:notes>
+</file>
+
+<file path=ppt/notesSlides/notesSlide8.xml><?xml version="1.0" encoding="utf-8"?>
+<p:notes xmlns:a="http://schemas.openxmlformats.org/drawingml/2006/main" xmlns:p="http://schemas.openxmlformats.org/presentationml/2006/main" xmlns:r="http://schemas.openxmlformats.org/officeDocument/2006/relationships">
+  <p:cSld>
+    <p:spTree>
+      <p:nvGrpSpPr>
+        <p:cNvPr id="1" name=""/>
+        <p:cNvGrpSpPr/>
+        <p:nvPr/>
+      </p:nvGrpSpPr>
+      <p:grpSpPr>
+        <a:xfrm>
+          <a:off x="0" y="0"/>
+          <a:ext cx="0" cy="0"/>
+          <a:chOff x="0" y="0"/>
+          <a:chExt cx="0" cy="0"/>
+        </a:xfrm>
+      </p:grpSpPr>
+      <p:sp>
+        <p:nvSpPr>
+          <p:cNvPr id="2" name="Slide Image Placeholder 1"/>
+          <p:cNvSpPr>
+            <a:spLocks noGrp="1"/>
+          </p:cNvSpPr>
+          <p:nvPr>
+            <p:ph type="sldImg" idx="2"/>
+          </p:nvPr>
+        </p:nvSpPr>
+        <p:spPr/>
+      </p:sp>
+      <p:sp>
+        <p:nvSpPr>
+          <p:cNvPr id="3" name="Notes Placeholder 2"/>
+          <p:cNvSpPr>
+            <a:spLocks noGrp="1"/>
+          </p:cNvSpPr>
+          <p:nvPr>
+            <p:ph type="body" idx="3" sz="quarter"/>
+          </p:nvPr>
+        </p:nvSpPr>
+        <p:spPr/>
+        <p:txBody>
+          <a:bodyPr/>
+          <a:lstStyle/>
+          <a:p>
+            <a:r>
+              <a:t>Teach why the SCALING choice is an availability decision — the non-obvious point of this slide is</a:t>
+            </a:r>
+          </a:p>
+          <a:p>
+            <a:r>
+              <a:t>that scaling up carries a downtime cost.</a:t>
+            </a:r>
+          </a:p>
+          <a:p>
+            <a:r>
+              <a:t>• Define both plainly: vertical scaling = a BIGGER server (more CPU/RAM); horizontal scaling = MORE</a:t>
+            </a:r>
+          </a:p>
+          <a:p>
+            <a:r>
+              <a:t>  servers. Same workload, two directions.</a:t>
+            </a:r>
+          </a:p>
+          <a:p>
+            <a:r>
+              <a:t>• Accent line — the teaching point: vertical scaling usually needs a shutdown/restart and hits a</a:t>
+            </a:r>
+          </a:p>
+          <a:p>
+            <a:r>
+              <a:t>  hardware CEILING, so it's an availability COST. You take the service down to grow it, and one day</a:t>
+            </a:r>
+          </a:p>
+          <a:p>
+            <a:r>
+              <a:t>  you can't grow it further.</a:t>
+            </a:r>
+          </a:p>
+          <a:p>
+            <a:r>
+              <a:t>• Last bullet: horizontal scaling is PREFERRED for availability (add servers with no outage);</a:t>
+            </a:r>
+          </a:p>
+          <a:p>
+            <a:r>
+              <a:t>  mitigate an unavoidable vertical change via an overnight window, a standby switch, or hot-swap.</a:t>
+            </a:r>
+          </a:p>
+          <a:p>
+            <a:r>
+              <a:t>Misconception to pre-empt: "scaling up is the easy, safe option." For availability it isn't —</a:t>
+            </a:r>
+          </a:p>
+          <a:p>
+            <a:r>
+              <a:t>vertical scaling means downtime and a ceiling; horizontal adds capacity without an outage.</a:t>
+            </a:r>
+          </a:p>
+          <a:p>
+            <a:r>
+              <a:t>Question to pose: "The Ledgerline database needs more grunt — resize the one box, or add servers?</a:t>
+            </a:r>
+          </a:p>
+          <a:p>
+            <a:r>
+              <a:t>Which costs you availability, and how would you soften it?" (vertical = downtime; use a window/standby).</a:t>
+            </a:r>
+          </a:p>
+          <a:p>
+            <a:r>
+              <a:t>UoC/AT3 tie: ICTCLD502 PC 2.4 (determine components that must scale vertically and the impact on</a:t>
+            </a:r>
+          </a:p>
+          <a:p>
+            <a:r>
+              <a:t>availability) — concept here; applied to the baseline in Topic 12.</a:t>
+            </a:r>
+          </a:p>
+        </p:txBody>
+      </p:sp>
+      <p:sp>
+        <p:nvSpPr>
+          <p:cNvPr id="4" name="Slide Number Placeholder 3"/>
+          <p:cNvSpPr>
+            <a:spLocks noGrp="1"/>
+          </p:cNvSpPr>
+          <p:nvPr>
+            <p:ph type="sldNum" idx="5" sz="quarter"/>
+          </p:nvPr>
+        </p:nvSpPr>
+        <p:spPr/>
+      </p:sp>
+    </p:spTree>
+  </p:cSld>
+  <p:clrMapOvr>
+    <a:masterClrMapping/>
+  </p:clrMapOvr>
+</p:notes>
+</file>
+
+<file path=ppt/notesSlides/notesSlide9.xml><?xml version="1.0" encoding="utf-8"?>
+<p:notes xmlns:a="http://schemas.openxmlformats.org/drawingml/2006/main" xmlns:p="http://schemas.openxmlformats.org/presentationml/2006/main" xmlns:r="http://schemas.openxmlformats.org/officeDocument/2006/relationships">
+  <p:cSld>
+    <p:spTree>
+      <p:nvGrpSpPr>
+        <p:cNvPr id="1" name=""/>
+        <p:cNvGrpSpPr/>
+        <p:nvPr/>
+      </p:nvGrpSpPr>
+      <p:grpSpPr>
+        <a:xfrm>
+          <a:off x="0" y="0"/>
+          <a:ext cx="0" cy="0"/>
+          <a:chOff x="0" y="0"/>
+          <a:chExt cx="0" cy="0"/>
+        </a:xfrm>
+      </p:grpSpPr>
+      <p:sp>
+        <p:nvSpPr>
+          <p:cNvPr id="2" name="Slide Image Placeholder 1"/>
+          <p:cNvSpPr>
+            <a:spLocks noGrp="1"/>
+          </p:cNvSpPr>
+          <p:nvPr>
+            <p:ph type="sldImg" idx="2"/>
+          </p:nvPr>
+        </p:nvSpPr>
+        <p:spPr/>
+      </p:sp>
+      <p:sp>
+        <p:nvSpPr>
+          <p:cNvPr id="3" name="Notes Placeholder 2"/>
+          <p:cNvSpPr>
+            <a:spLocks noGrp="1"/>
+          </p:cNvSpPr>
+          <p:nvPr>
+            <p:ph type="body" idx="3" sz="quarter"/>
+          </p:nvPr>
+        </p:nvSpPr>
+        <p:spPr/>
+        <p:txBody>
+          <a:bodyPr/>
+          <a:lstStyle/>
+          <a:p>
+            <a:r>
+              <a:t>Facilitation — the Section 2 practice, and it directly feeds Topic 12's design. Students work on</a:t>
+            </a:r>
+          </a:p>
+          <a:p>
+            <a:r>
+              <a:t>the single-AZ Accounting baseline they'd be hardening. Have the baseline design open.</a:t>
+            </a:r>
+          </a:p>
+          <a:p>
+            <a:r>
+              <a:t>Tell students: "Here's the single-AZ Accounting baseline you'll be making highly available. As the</a:t>
+            </a:r>
+          </a:p>
+          <a:p>
+            <a:r>
+              <a:t>MTS consultant, find its weak points — where would ONE failure take the whole thing down?"</a:t>
+            </a:r>
+          </a:p>
+          <a:p>
+            <a:r>
+              <a:t>Steps (put on the board):</a:t>
+            </a:r>
+          </a:p>
+          <a:p>
+            <a:r>
+              <a:t>1. List its single points of failure — think through each tier: the AZ, the database, the running</a:t>
+            </a:r>
+          </a:p>
+          <a:p>
+            <a:r>
+              <a:t>   instance, the egress/NAT path.</a:t>
+            </a:r>
+          </a:p>
+          <a:p>
+            <a:r>
+              <a:t>2. Estimate the baseline's recovery objectives (RPO / RTO) and note where they fall short of the</a:t>
+            </a:r>
+          </a:p>
+          <a:p>
+            <a:r>
+              <a:t>   99.5% business-hours target.</a:t>
+            </a:r>
+          </a:p>
+          <a:p>
+            <a:r>
+              <a:t>Must produce: a written SPOF list plus a rough RPO/RTO estimate — KEEP it; Topic 12 designs these out.</a:t>
+            </a:r>
+          </a:p>
+          <a:p>
+            <a:r>
+              <a:t>Timing: ~10 min then share. Where they get stuck: they stop at "the server" — prompt them tier by</a:t>
+            </a:r>
+          </a:p>
+          <a:p>
+            <a:r>
+              <a:t>tier (network, compute, database, egress) so they find the single AZ and single RDS as the big ones.</a:t>
+            </a:r>
+          </a:p>
+          <a:p>
+            <a:r>
+              <a:t>Share-back prompt: build a combined SPOF list on the board; flag which single failure is the most</a:t>
+            </a:r>
+          </a:p>
+          <a:p>
+            <a:r>
+              <a:t>damaging (the AZ — it takes every tier at once).</a:t>
+            </a:r>
+          </a:p>
+          <a:p>
+            <a:r>
+              <a:t>No-leakage note: this is practice on the Ledgerline/Accounting baseline; AT3 assesses the same SPOF</a:t>
+            </a:r>
+          </a:p>
+          <a:p>
+            <a:r>
+              <a:t>analysis on the LMS system — comparable, not identical. Don't let them work the assessed system here.</a:t>
+            </a:r>
+          </a:p>
+        </p:txBody>
+      </p:sp>
+      <p:sp>
+        <p:nvSpPr>
+          <p:cNvPr id="4" name="Slide Number Placeholder 3"/>
+          <p:cNvSpPr>
+            <a:spLocks noGrp="1"/>
+          </p:cNvSpPr>
+          <p:nvPr>
+            <p:ph type="sldNum" idx="5" sz="quarter"/>
+          </p:nvPr>
+        </p:nvSpPr>
+        <p:spPr/>
+      </p:sp>
+    </p:spTree>
+  </p:cSld>
+  <p:clrMapOvr>
+    <a:masterClrMapping/>
+  </p:clrMapOvr>
+</p:notes>
 </file>
 
 <file path=ppt/slideLayouts/slideLayout1.xml><?xml version="1.0" encoding="utf-8"?>
@@ -12928,4 +15083,324 @@
   </a:objectDefaults>
   <a:extraClrSchemeLst/>
 </a:theme>
+</file>
+
+<file path=ppt/theme/theme2.xml><?xml version="1.0" encoding="utf-8"?>
+<a:theme xmlns:a="http://schemas.openxmlformats.org/drawingml/2006/main" name="Office Theme">
+  <a:themeElements>
+    <a:clrScheme name="Office">
+      <a:dk1>
+        <a:sysClr val="windowText" lastClr="000000"/>
+      </a:dk1>
+      <a:lt1>
+        <a:sysClr val="window" lastClr="FFFFFF"/>
+      </a:lt1>
+      <a:dk2>
+        <a:srgbClr val="1F497D"/>
+      </a:dk2>
+      <a:lt2>
+        <a:srgbClr val="EEECE1"/>
+      </a:lt2>
+      <a:accent1>
+        <a:srgbClr val="4F81BD"/>
+      </a:accent1>
+      <a:accent2>
+        <a:srgbClr val="C0504D"/>
+      </a:accent2>
+      <a:accent3>
+        <a:srgbClr val="9BBB59"/>
+      </a:accent3>
+      <a:accent4>
+        <a:srgbClr val="8064A2"/>
+      </a:accent4>
+      <a:accent5>
+        <a:srgbClr val="4BACC6"/>
+      </a:accent5>
+      <a:accent6>
+        <a:srgbClr val="F79646"/>
+      </a:accent6>
+      <a:hlink>
+        <a:srgbClr val="0000FF"/>
+      </a:hlink>
+      <a:folHlink>
+        <a:srgbClr val="800080"/>
+      </a:folHlink>
+    </a:clrScheme>
+    <a:fontScheme name="Office">
+      <a:majorFont>
+        <a:latin typeface="Calibri"/>
+        <a:ea typeface=""/>
+        <a:cs typeface=""/>
+        <a:font script="Jpan" typeface="ＭＳ Ｐゴシック"/>
+        <a:font script="Hang" typeface="맑은 고딕"/>
+        <a:font script="Hans" typeface="宋体"/>
+        <a:font script="Hant" typeface="新細明體"/>
+        <a:font script="Arab" typeface="Times New Roman"/>
+        <a:font script="Hebr" typeface="Times New Roman"/>
+        <a:font script="Thai" typeface="Angsana New"/>
+        <a:font script="Ethi" typeface="Nyala"/>
+        <a:font script="Beng" typeface="Vrinda"/>
+        <a:font script="Gujr" typeface="Shruti"/>
+        <a:font script="Khmr" typeface="MoolBoran"/>
+        <a:font script="Knda" typeface="Tunga"/>
+        <a:font script="Guru" typeface="Raavi"/>
+        <a:font script="Cans" typeface="Euphemia"/>
+        <a:font script="Cher" typeface="Plantagenet Cherokee"/>
+        <a:font script="Yiii" typeface="Microsoft Yi Baiti"/>
+        <a:font script="Tibt" typeface="Microsoft Himalaya"/>
+        <a:font script="Thaa" typeface="MV Boli"/>
+        <a:font script="Deva" typeface="Mangal"/>
+        <a:font script="Telu" typeface="Gautami"/>
+        <a:font script="Taml" typeface="Latha"/>
+        <a:font script="Syrc" typeface="Estrangelo Edessa"/>
+        <a:font script="Orya" typeface="Kalinga"/>
+        <a:font script="Mlym" typeface="Kartika"/>
+        <a:font script="Laoo" typeface="DokChampa"/>
+        <a:font script="Sinh" typeface="Iskoola Pota"/>
+        <a:font script="Mong" typeface="Mongolian Baiti"/>
+        <a:font script="Viet" typeface="Times New Roman"/>
+        <a:font script="Uigh" typeface="Microsoft Uighur"/>
+        <a:font script="Geor" typeface="Sylfaen"/>
+      </a:majorFont>
+      <a:minorFont>
+        <a:latin typeface="Calibri"/>
+        <a:ea typeface=""/>
+        <a:cs typeface=""/>
+        <a:font script="Jpan" typeface="ＭＳ Ｐゴシック"/>
+        <a:font script="Hang" typeface="맑은 고딕"/>
+        <a:font script="Hans" typeface="宋体"/>
+        <a:font script="Hant" typeface="新細明體"/>
+        <a:font script="Arab" typeface="Arial"/>
+        <a:font script="Hebr" typeface="Arial"/>
+        <a:font script="Thai" typeface="Cordia New"/>
+        <a:font script="Ethi" typeface="Nyala"/>
+        <a:font script="Beng" typeface="Vrinda"/>
+        <a:font script="Gujr" typeface="Shruti"/>
+        <a:font script="Khmr" typeface="DaunPenh"/>
+        <a:font script="Knda" typeface="Tunga"/>
+        <a:font script="Guru" typeface="Raavi"/>
+        <a:font script="Cans" typeface="Euphemia"/>
+        <a:font script="Cher" typeface="Plantagenet Cherokee"/>
+        <a:font script="Yiii" typeface="Microsoft Yi Baiti"/>
+        <a:font script="Tibt" typeface="Microsoft Himalaya"/>
+        <a:font script="Thaa" typeface="MV Boli"/>
+        <a:font script="Deva" typeface="Mangal"/>
+        <a:font script="Telu" typeface="Gautami"/>
+        <a:font script="Taml" typeface="Latha"/>
+        <a:font script="Syrc" typeface="Estrangelo Edessa"/>
+        <a:font script="Orya" typeface="Kalinga"/>
+        <a:font script="Mlym" typeface="Kartika"/>
+        <a:font script="Laoo" typeface="DokChampa"/>
+        <a:font script="Sinh" typeface="Iskoola Pota"/>
+        <a:font script="Mong" typeface="Mongolian Baiti"/>
+        <a:font script="Viet" typeface="Arial"/>
+        <a:font script="Uigh" typeface="Microsoft Uighur"/>
+        <a:font script="Geor" typeface="Sylfaen"/>
+      </a:minorFont>
+    </a:fontScheme>
+    <a:fmtScheme name="Office">
+      <a:fillStyleLst>
+        <a:solidFill>
+          <a:schemeClr val="phClr"/>
+        </a:solidFill>
+        <a:gradFill rotWithShape="1">
+          <a:gsLst>
+            <a:gs pos="0">
+              <a:schemeClr val="phClr">
+                <a:tint val="50000"/>
+                <a:satMod val="300000"/>
+              </a:schemeClr>
+            </a:gs>
+            <a:gs pos="35000">
+              <a:schemeClr val="phClr">
+                <a:tint val="37000"/>
+                <a:satMod val="300000"/>
+              </a:schemeClr>
+            </a:gs>
+            <a:gs pos="100000">
+              <a:schemeClr val="phClr">
+                <a:tint val="15000"/>
+                <a:satMod val="350000"/>
+              </a:schemeClr>
+            </a:gs>
+          </a:gsLst>
+          <a:lin ang="16200000" scaled="1"/>
+        </a:gradFill>
+        <a:gradFill rotWithShape="1">
+          <a:gsLst>
+            <a:gs pos="0">
+              <a:schemeClr val="phClr">
+                <a:tint val="100000"/>
+                <a:shade val="100000"/>
+                <a:satMod val="130000"/>
+              </a:schemeClr>
+            </a:gs>
+            <a:gs pos="100000">
+              <a:schemeClr val="phClr">
+                <a:tint val="50000"/>
+                <a:shade val="100000"/>
+                <a:satMod val="350000"/>
+              </a:schemeClr>
+            </a:gs>
+          </a:gsLst>
+          <a:lin ang="16200000" scaled="0"/>
+        </a:gradFill>
+      </a:fillStyleLst>
+      <a:lnStyleLst>
+        <a:ln w="9525" cap="flat" cmpd="sng" algn="ctr">
+          <a:solidFill>
+            <a:schemeClr val="phClr">
+              <a:shade val="95000"/>
+              <a:satMod val="105000"/>
+            </a:schemeClr>
+          </a:solidFill>
+          <a:prstDash val="solid"/>
+        </a:ln>
+        <a:ln w="25400" cap="flat" cmpd="sng" algn="ctr">
+          <a:solidFill>
+            <a:schemeClr val="phClr"/>
+          </a:solidFill>
+          <a:prstDash val="solid"/>
+        </a:ln>
+        <a:ln w="38100" cap="flat" cmpd="sng" algn="ctr">
+          <a:solidFill>
+            <a:schemeClr val="phClr"/>
+          </a:solidFill>
+          <a:prstDash val="solid"/>
+        </a:ln>
+      </a:lnStyleLst>
+      <a:effectStyleLst>
+        <a:effectStyle>
+          <a:effectLst>
+            <a:outerShdw blurRad="40000" dist="20000" dir="5400000" rotWithShape="0">
+              <a:srgbClr val="000000">
+                <a:alpha val="38000"/>
+              </a:srgbClr>
+            </a:outerShdw>
+          </a:effectLst>
+        </a:effectStyle>
+        <a:effectStyle>
+          <a:effectLst>
+            <a:outerShdw blurRad="40000" dist="23000" dir="5400000" rotWithShape="0">
+              <a:srgbClr val="000000">
+                <a:alpha val="35000"/>
+              </a:srgbClr>
+            </a:outerShdw>
+          </a:effectLst>
+        </a:effectStyle>
+        <a:effectStyle>
+          <a:effectLst>
+            <a:outerShdw blurRad="40000" dist="23000" dir="5400000" rotWithShape="0">
+              <a:srgbClr val="000000">
+                <a:alpha val="35000"/>
+              </a:srgbClr>
+            </a:outerShdw>
+          </a:effectLst>
+          <a:scene3d>
+            <a:camera prst="orthographicFront">
+              <a:rot lat="0" lon="0" rev="0"/>
+            </a:camera>
+            <a:lightRig rig="threePt" dir="t">
+              <a:rot lat="0" lon="0" rev="1200000"/>
+            </a:lightRig>
+          </a:scene3d>
+          <a:sp3d>
+            <a:bevelT w="63500" h="25400"/>
+          </a:sp3d>
+        </a:effectStyle>
+      </a:effectStyleLst>
+      <a:bgFillStyleLst>
+        <a:solidFill>
+          <a:schemeClr val="phClr"/>
+        </a:solidFill>
+        <a:gradFill rotWithShape="1">
+          <a:gsLst>
+            <a:gs pos="0">
+              <a:schemeClr val="phClr">
+                <a:tint val="40000"/>
+                <a:satMod val="350000"/>
+              </a:schemeClr>
+            </a:gs>
+            <a:gs pos="40000">
+              <a:schemeClr val="phClr">
+                <a:tint val="45000"/>
+                <a:shade val="99000"/>
+                <a:satMod val="350000"/>
+              </a:schemeClr>
+            </a:gs>
+            <a:gs pos="100000">
+              <a:schemeClr val="phClr">
+                <a:shade val="20000"/>
+                <a:satMod val="255000"/>
+              </a:schemeClr>
+            </a:gs>
+          </a:gsLst>
+          <a:path path="circle">
+            <a:fillToRect l="50000" t="-80000" r="50000" b="180000"/>
+          </a:path>
+        </a:gradFill>
+        <a:gradFill rotWithShape="1">
+          <a:gsLst>
+            <a:gs pos="0">
+              <a:schemeClr val="phClr">
+                <a:tint val="80000"/>
+                <a:satMod val="300000"/>
+              </a:schemeClr>
+            </a:gs>
+            <a:gs pos="100000">
+              <a:schemeClr val="phClr">
+                <a:shade val="30000"/>
+                <a:satMod val="200000"/>
+              </a:schemeClr>
+            </a:gs>
+          </a:gsLst>
+          <a:path path="circle">
+            <a:fillToRect l="50000" t="50000" r="50000" b="50000"/>
+          </a:path>
+        </a:gradFill>
+      </a:bgFillStyleLst>
+    </a:fmtScheme>
+  </a:themeElements>
+  <a:objectDefaults>
+    <a:spDef>
+      <a:spPr/>
+      <a:bodyPr/>
+      <a:lstStyle/>
+      <a:style>
+        <a:lnRef idx="1">
+          <a:schemeClr val="accent1"/>
+        </a:lnRef>
+        <a:fillRef idx="3">
+          <a:schemeClr val="accent1"/>
+        </a:fillRef>
+        <a:effectRef idx="2">
+          <a:schemeClr val="accent1"/>
+        </a:effectRef>
+        <a:fontRef idx="minor">
+          <a:schemeClr val="lt1"/>
+        </a:fontRef>
+      </a:style>
+    </a:spDef>
+    <a:lnDef>
+      <a:spPr/>
+      <a:bodyPr/>
+      <a:lstStyle/>
+      <a:style>
+        <a:lnRef idx="2">
+          <a:schemeClr val="accent1"/>
+        </a:lnRef>
+        <a:fillRef idx="0">
+          <a:schemeClr val="accent1"/>
+        </a:fillRef>
+        <a:effectRef idx="1">
+          <a:schemeClr val="accent1"/>
+        </a:effectRef>
+        <a:fontRef idx="minor">
+          <a:schemeClr val="tx1"/>
+        </a:fontRef>
+      </a:style>
+    </a:lnDef>
+  </a:objectDefaults>
+  <a:extraClrSchemeLst/>
+</a:theme>
 </file>
--- a/S1-CL1-Cloud-Design-Build/delivery/topic_11/Topic_11_Slides.pptx
+++ b/S1-CL1-Cloud-Design-Build/delivery/topic_11/Topic_11_Slides.pptx
@@ -533,7 +533,7 @@
           </a:p>
           <a:p>
             <a:r>
-              <a:t>  available — resilient to losing an Availability Zone. This Topic is the vocabulary.</a:t>
+              <a:t>available — resilient to losing an Availability Zone. This Topic is the vocabulary.</a:t>
             </a:r>
           </a:p>
           <a:p>
@@ -543,12 +543,12 @@
           </a:p>
           <a:p>
             <a:r>
-              <a:t>  the upgrade, T13 = you implement + simulate the failure, T14 = you close out. Say it plainly</a:t>
-            </a:r>
-          </a:p>
-          <a:p>
-            <a:r>
-              <a:t>  so the keen student knows nothing gets built today.</a:t>
+              <a:t>the upgrade, T13 = you implement + simulate the failure, T14 = you close out. Say it plainly</a:t>
+            </a:r>
+          </a:p>
+          <a:p>
+            <a:r>
+              <a:t>so the keen student knows nothing gets built today.</a:t>
             </a:r>
           </a:p>
           <a:p>
@@ -558,7 +558,7 @@
           </a:p>
           <a:p>
             <a:r>
-              <a:t>  plus the cloud toolkit that removes each weakness. Everything downstream reuses this.</a:t>
+              <a:t>plus the cloud toolkit that removes each weakness. Everything downstream reuses this.</a:t>
             </a:r>
           </a:p>
           <a:p>
@@ -568,7 +568,7 @@
           </a:p>
           <a:p>
             <a:r>
-              <a:t>  they've carried all term; today they learn to REASON about its availability.</a:t>
+              <a:t>they've carried all term; today they learn to REASON about its availability.</a:t>
             </a:r>
           </a:p>
           <a:p>
@@ -688,7 +688,7 @@
           </a:p>
           <a:p>
             <a:r>
-              <a:t>  so no single failure takes the service down. HA is an act of design, not a property of the platform.</a:t>
+              <a:t>so no single failure takes the service down. HA is an act of design, not a property of the platform.</a:t>
             </a:r>
           </a:p>
           <a:p>
@@ -698,7 +698,7 @@
           </a:p>
           <a:p>
             <a:r>
-              <a:t>  on-prem one. The baseline is the proof.</a:t>
+              <a:t>on-prem one. The baseline is the proof.</a:t>
             </a:r>
           </a:p>
           <a:p>
@@ -813,7 +813,7 @@
           </a:p>
           <a:p>
             <a:r>
-              <a:t>  This is the headline move against the baseline's biggest SPOF.</a:t>
+              <a:t>This is the headline move against the baseline's biggest SPOF.</a:t>
             </a:r>
           </a:p>
           <a:p>
@@ -823,7 +823,7 @@
           </a:p>
           <a:p>
             <a:r>
-              <a:t>  half the value, not just distribution).</a:t>
+              <a:t>half the value, not just distribution).</a:t>
             </a:r>
           </a:p>
           <a:p>
@@ -833,7 +833,7 @@
           </a:p>
           <a:p>
             <a:r>
-              <a:t>  handling load — if an AZ's instances die, the ASG replaces them elsewhere.</a:t>
+              <a:t>handling load — if an AZ's instances die, the ASG replaces them elsewhere.</a:t>
             </a:r>
           </a:p>
           <a:p>
@@ -843,7 +843,7 @@
           </a:p>
           <a:p>
             <a:r>
-              <a:t>  the ceiling out loud: Multi-Region / full DR is OUT of scope (that's CL2). CL1 HA = cross-AZ.</a:t>
+              <a:t>the ceiling out loud: Multi-Region / full DR is OUT of scope (that's CL2). CL1 HA = cross-AZ.</a:t>
             </a:r>
           </a:p>
           <a:p>
@@ -953,7 +953,7 @@
           </a:p>
           <a:p>
             <a:r>
-              <a:t>  is copied to the standby in real time, so the standby is always current.</a:t>
+              <a:t>is copied to the standby in real time, so the standby is always current.</a:t>
             </a:r>
           </a:p>
           <a:p>
@@ -963,7 +963,7 @@
           </a:p>
           <a:p>
             <a:r>
-              <a:t>  automatically — service continues with SECONDS of downtime, not hours. Automatic is the key word.</a:t>
+              <a:t>automatically — service continues with SECONDS of downtime, not hours. Automatic is the key word.</a:t>
             </a:r>
           </a:p>
           <a:p>
@@ -973,7 +973,7 @@
           </a:p>
           <a:p>
             <a:r>
-              <a:t>  so failover needs NO app reconfiguration — the name now points at the promoted standby.</a:t>
+              <a:t>so failover needs NO app reconfiguration — the name now points at the promoted standby.</a:t>
             </a:r>
           </a:p>
           <a:p>
@@ -1103,7 +1103,7 @@
           </a:p>
           <a:p>
             <a:r>
-              <a:t>   NAT gateway → ?</a:t>
+              <a:t>NAT gateway → ?</a:t>
             </a:r>
           </a:p>
           <a:p>
@@ -1233,7 +1233,7 @@
           </a:p>
           <a:p>
             <a:r>
-              <a:t>  downtime, even when parts fail. Stress "even when parts fail" — HA assumes failure happens.</a:t>
+              <a:t>downtime, even when parts fail. Stress "even when parts fail" — HA assumes failure happens.</a:t>
             </a:r>
           </a:p>
           <a:p>
@@ -1243,7 +1243,7 @@
           </a:p>
           <a:p>
             <a:r>
-              <a:t>  hours/month offline; 99.999% ("five nines") ≈ 26 seconds/month. Let that gap land.</a:t>
+              <a:t>hours/month offline; 99.999% ("five nines") ≈ 26 seconds/month. Let that gap land.</a:t>
             </a:r>
           </a:p>
           <a:p>
@@ -1253,7 +1253,7 @@
           </a:p>
           <a:p>
             <a:r>
-              <a:t>  This is the hinge for the "YAT's target" slide: you buy only the availability you need.</a:t>
+              <a:t>This is the hinge for the "YAT's target" slide: you buy only the availability you need.</a:t>
             </a:r>
           </a:p>
           <a:p>
@@ -1368,7 +1368,7 @@
           </a:p>
           <a:p>
             <a:r>
-              <a:t>  A service can be up (available) yet returning errors (unreliable) — different properties.</a:t>
+              <a:t>A service can be up (available) yet returning errors (unreliable) — different properties.</a:t>
             </a:r>
           </a:p>
           <a:p>
@@ -1378,7 +1378,7 @@
           </a:p>
           <a:p>
             <a:r>
-              <a:t>  the number you promise.</a:t>
+              <a:t>the number you promise.</a:t>
             </a:r>
           </a:p>
           <a:p>
@@ -1388,7 +1388,7 @@
           </a:p>
           <a:p>
             <a:r>
-              <a:t>  and credits/penalties apply. The SLA is the contract that makes the target real.</a:t>
+              <a:t>and credits/penalties apply. The SLA is the contract that makes the target real.</a:t>
             </a:r>
           </a:p>
           <a:p>
@@ -1503,7 +1503,7 @@
           </a:p>
           <a:p>
             <a:r>
-              <a:t>  ~07:30-18:00) — there is NO 24/7 requirement. The workload shape sets the target.</a:t>
+              <a:t>~07:30-18:00) — there is NO 24/7 requirement. The workload shape sets the target.</a:t>
             </a:r>
           </a:p>
           <a:p>
@@ -1513,7 +1513,7 @@
           </a:p>
           <a:p>
             <a:r>
-              <a:t>  99.999%. HA here means AZ resilience, sized to the business.</a:t>
+              <a:t>99.999%. HA here means AZ resilience, sized to the business.</a:t>
             </a:r>
           </a:p>
           <a:p>
@@ -1523,7 +1523,7 @@
           </a:p>
           <a:p>
             <a:r>
-              <a:t>  business-hours workload simply doesn't need. Right-sizing availability is the consultant skill.</a:t>
+              <a:t>business-hours workload simply doesn't need. Right-sizing availability is the consultant skill.</a:t>
             </a:r>
           </a:p>
           <a:p>
@@ -1778,7 +1778,7 @@
           </a:p>
           <a:p>
             <a:r>
-              <a:t>  service. One weak link and everything downstream is down.</a:t>
+              <a:t>service. One weak link and everything downstream is down.</a:t>
             </a:r>
           </a:p>
           <a:p>
@@ -1788,7 +1788,7 @@
           </a:p>
           <a:p>
             <a:r>
-              <a:t>  of the car is. That's a SPOF.</a:t>
+              <a:t>of the car is. That's a SPOF.</a:t>
             </a:r>
           </a:p>
           <a:p>
@@ -1798,7 +1798,7 @@
           </a:p>
           <a:p>
             <a:r>
-              <a:t>  on ONE internet link; one server; one Availability Zone. Each is a single failure that stops it all.</a:t>
+              <a:t>on ONE internet link; one server; one Availability Zone. Each is a single failure that stops it all.</a:t>
             </a:r>
           </a:p>
           <a:p>
@@ -1913,7 +1913,7 @@
           </a:p>
           <a:p>
             <a:r>
-              <a:t>  back up. Think TIME.</a:t>
+              <a:t>back up. Think TIME.</a:t>
             </a:r>
           </a:p>
           <a:p>
@@ -1923,7 +1923,7 @@
           </a:p>
           <a:p>
             <a:r>
-              <a:t>  your last good copy is. Think DATA.</a:t>
+              <a:t>your last good copy is. Think DATA.</a:t>
             </a:r>
           </a:p>
           <a:p>
@@ -1933,7 +1933,7 @@
           </a:p>
           <a:p>
             <a:r>
-              <a:t>  each + 1 h testing → RTO 2.5 h. Doing the arithmetic out loud is what makes it concrete.</a:t>
+              <a:t>each + 1 h testing → RTO 2.5 h. Doing the arithmetic out loud is what makes it concrete.</a:t>
             </a:r>
           </a:p>
           <a:p>
@@ -1943,7 +1943,7 @@
           </a:p>
           <a:p>
             <a:r>
-              <a:t>  you set objectives the business can afford (echoes the cost-of-nines theme).</a:t>
+              <a:t>you set objectives the business can afford (echoes the cost-of-nines theme).</a:t>
             </a:r>
           </a:p>
           <a:p>
@@ -2058,7 +2058,7 @@
           </a:p>
           <a:p>
             <a:r>
-              <a:t>  servers. Same workload, two directions.</a:t>
+              <a:t>servers. Same workload, two directions.</a:t>
             </a:r>
           </a:p>
           <a:p>
@@ -2068,12 +2068,12 @@
           </a:p>
           <a:p>
             <a:r>
-              <a:t>  hardware CEILING, so it's an availability COST. You take the service down to grow it, and one day</a:t>
-            </a:r>
-          </a:p>
-          <a:p>
-            <a:r>
-              <a:t>  you can't grow it further.</a:t>
+              <a:t>hardware CEILING, so it's an availability COST. You take the service down to grow it, and one day</a:t>
+            </a:r>
+          </a:p>
+          <a:p>
+            <a:r>
+              <a:t>you can't grow it further.</a:t>
             </a:r>
           </a:p>
           <a:p>
@@ -2083,7 +2083,7 @@
           </a:p>
           <a:p>
             <a:r>
-              <a:t>  mitigate an unavoidable vertical change via an overnight window, a standby switch, or hot-swap.</a:t>
+              <a:t>mitigate an unavoidable vertical change via an overnight window, a standby switch, or hot-swap.</a:t>
             </a:r>
           </a:p>
           <a:p>
@@ -2213,7 +2213,7 @@
           </a:p>
           <a:p>
             <a:r>
-              <a:t>   instance, the egress/NAT path.</a:t>
+              <a:t>instance, the egress/NAT path.</a:t>
             </a:r>
           </a:p>
           <a:p>
@@ -2223,7 +2223,7 @@
           </a:p>
           <a:p>
             <a:r>
-              <a:t>   99.5% business-hours target.</a:t>
+              <a:t>99.5% business-hours target.</a:t>
             </a:r>
           </a:p>
           <a:p>
@@ -5643,16 +5643,16 @@
             <a:r>
               <a:rPr sz="2400" b="1" i="0">
                 <a:solidFill>
-                  <a:srgbClr val="27B5CE"/>
+                  <a:srgbClr val="EDAB0C"/>
                 </a:solidFill>
                 <a:latin typeface="Roboto"/>
               </a:rPr>
               <a:t>■  </a:t>
             </a:r>
             <a:r>
-              <a:rPr sz="2400" b="1" i="0">
-                <a:solidFill>
-                  <a:srgbClr val="27B5CE"/>
+              <a:rPr sz="2400" b="0" i="0">
+                <a:solidFill>
+                  <a:srgbClr val="2A2929"/>
                 </a:solidFill>
                 <a:latin typeface="Roboto"/>
               </a:rPr>
@@ -6001,16 +6001,16 @@
             <a:r>
               <a:rPr sz="2400" b="1" i="0">
                 <a:solidFill>
-                  <a:srgbClr val="27B5CE"/>
+                  <a:srgbClr val="EDAB0C"/>
                 </a:solidFill>
                 <a:latin typeface="Roboto"/>
               </a:rPr>
               <a:t>■  </a:t>
             </a:r>
             <a:r>
-              <a:rPr sz="2400" b="1" i="0">
-                <a:solidFill>
-                  <a:srgbClr val="27B5CE"/>
+              <a:rPr sz="2400" b="0" i="0">
+                <a:solidFill>
+                  <a:srgbClr val="2A2929"/>
                 </a:solidFill>
                 <a:latin typeface="Roboto"/>
               </a:rPr>
@@ -6359,16 +6359,16 @@
             <a:r>
               <a:rPr sz="2400" b="1" i="0">
                 <a:solidFill>
-                  <a:srgbClr val="27B5CE"/>
+                  <a:srgbClr val="EDAB0C"/>
                 </a:solidFill>
                 <a:latin typeface="Roboto"/>
               </a:rPr>
               <a:t>■  </a:t>
             </a:r>
             <a:r>
-              <a:rPr sz="2400" b="1" i="0">
-                <a:solidFill>
-                  <a:srgbClr val="27B5CE"/>
+              <a:rPr sz="2400" b="0" i="0">
+                <a:solidFill>
+                  <a:srgbClr val="2A2929"/>
                 </a:solidFill>
                 <a:latin typeface="Roboto"/>
               </a:rPr>
@@ -6730,7 +6730,7 @@
               <a:t>■  </a:t>
             </a:r>
             <a:r>
-              <a:rPr sz="1700" b="1" i="0">
+              <a:rPr sz="1700" b="0" i="0">
                 <a:solidFill>
                   <a:srgbClr val="2A2929"/>
                 </a:solidFill>
@@ -6816,16 +6816,16 @@
             <a:r>
               <a:rPr sz="1700" b="1" i="0">
                 <a:solidFill>
-                  <a:srgbClr val="27B5CE"/>
+                  <a:srgbClr val="EDAB0C"/>
                 </a:solidFill>
                 <a:latin typeface="Roboto"/>
               </a:rPr>
               <a:t>■  </a:t>
             </a:r>
             <a:r>
-              <a:rPr sz="1700" b="1" i="0">
-                <a:solidFill>
-                  <a:srgbClr val="27B5CE"/>
+              <a:rPr sz="1700" b="0" i="0">
+                <a:solidFill>
+                  <a:srgbClr val="2A2929"/>
                 </a:solidFill>
                 <a:latin typeface="Roboto"/>
               </a:rPr>
@@ -8273,16 +8273,16 @@
             <a:r>
               <a:rPr sz="2400" b="1" i="0">
                 <a:solidFill>
-                  <a:srgbClr val="205F61"/>
+                  <a:srgbClr val="EDAB0C"/>
                 </a:solidFill>
                 <a:latin typeface="Roboto"/>
               </a:rPr>
               <a:t>■  </a:t>
             </a:r>
             <a:r>
-              <a:rPr sz="2400" b="1" i="0">
-                <a:solidFill>
-                  <a:srgbClr val="205F61"/>
+              <a:rPr sz="2400" b="0" i="0">
+                <a:solidFill>
+                  <a:srgbClr val="2A2929"/>
                 </a:solidFill>
                 <a:latin typeface="Roboto"/>
               </a:rPr>
@@ -8693,16 +8693,16 @@
             <a:r>
               <a:rPr sz="2400" b="1" i="0">
                 <a:solidFill>
-                  <a:srgbClr val="205F61"/>
+                  <a:srgbClr val="EDAB0C"/>
                 </a:solidFill>
                 <a:latin typeface="Roboto"/>
               </a:rPr>
               <a:t>■  </a:t>
             </a:r>
             <a:r>
-              <a:rPr sz="2400" b="1" i="0">
-                <a:solidFill>
-                  <a:srgbClr val="205F61"/>
+              <a:rPr sz="2400" b="0" i="0">
+                <a:solidFill>
+                  <a:srgbClr val="2A2929"/>
                 </a:solidFill>
                 <a:latin typeface="Roboto"/>
               </a:rPr>
@@ -9051,16 +9051,16 @@
             <a:r>
               <a:rPr sz="1700" b="1" i="0">
                 <a:solidFill>
-                  <a:srgbClr val="205F61"/>
+                  <a:srgbClr val="EDAB0C"/>
                 </a:solidFill>
                 <a:latin typeface="Roboto"/>
               </a:rPr>
               <a:t>■  </a:t>
             </a:r>
             <a:r>
-              <a:rPr sz="1700" b="1" i="0">
-                <a:solidFill>
-                  <a:srgbClr val="205F61"/>
+              <a:rPr sz="1700" b="0" i="0">
+                <a:solidFill>
+                  <a:srgbClr val="2A2929"/>
                 </a:solidFill>
                 <a:latin typeface="Roboto"/>
               </a:rPr>
@@ -9415,7 +9415,7 @@
               <a:t>■  </a:t>
             </a:r>
             <a:r>
-              <a:rPr sz="1700" b="1" i="0">
+              <a:rPr sz="1700" b="0" i="0">
                 <a:solidFill>
                   <a:srgbClr val="2A2929"/>
                 </a:solidFill>
@@ -9470,16 +9470,16 @@
             <a:r>
               <a:rPr sz="1700" b="1" i="0">
                 <a:solidFill>
-                  <a:srgbClr val="205F61"/>
+                  <a:srgbClr val="EDAB0C"/>
                 </a:solidFill>
                 <a:latin typeface="Roboto"/>
               </a:rPr>
               <a:t>■  </a:t>
             </a:r>
             <a:r>
-              <a:rPr sz="1700" b="1" i="0">
-                <a:solidFill>
-                  <a:srgbClr val="205F61"/>
+              <a:rPr sz="1700" b="0" i="0">
+                <a:solidFill>
+                  <a:srgbClr val="2A2929"/>
                 </a:solidFill>
                 <a:latin typeface="Roboto"/>
               </a:rPr>
@@ -9908,16 +9908,16 @@
             <a:r>
               <a:rPr sz="2400" b="1" i="0">
                 <a:solidFill>
-                  <a:srgbClr val="92268F"/>
+                  <a:srgbClr val="EDAB0C"/>
                 </a:solidFill>
                 <a:latin typeface="Roboto"/>
               </a:rPr>
               <a:t>■  </a:t>
             </a:r>
             <a:r>
-              <a:rPr sz="2400" b="1" i="0">
-                <a:solidFill>
-                  <a:srgbClr val="92268F"/>
+              <a:rPr sz="2400" b="0" i="0">
+                <a:solidFill>
+                  <a:srgbClr val="2A2929"/>
                 </a:solidFill>
                 <a:latin typeface="Roboto"/>
               </a:rPr>
@@ -10904,7 +10904,7 @@
             <a:r>
               <a:rPr sz="1800" b="1" i="0">
                 <a:solidFill>
-                  <a:srgbClr val="EDAB0C"/>
+                  <a:srgbClr val="205F61"/>
                 </a:solidFill>
                 <a:latin typeface="Roboto"/>
               </a:rPr>
@@ -10928,7 +10928,7 @@
             <a:avLst/>
           </a:prstGeom>
           <a:solidFill>
-            <a:srgbClr val="EDAB0C"/>
+            <a:srgbClr val="205F61"/>
           </a:solidFill>
           <a:ln>
             <a:noFill/>
@@ -11018,7 +11018,7 @@
             <a:avLst/>
           </a:prstGeom>
           <a:solidFill>
-            <a:srgbClr val="EDAB0C"/>
+            <a:srgbClr val="205F61"/>
           </a:solidFill>
           <a:ln>
             <a:noFill/>
@@ -11147,7 +11147,7 @@
             <a:avLst/>
           </a:prstGeom>
           <a:solidFill>
-            <a:srgbClr val="EDAB0C"/>
+            <a:srgbClr val="205F61"/>
           </a:solidFill>
           <a:ln>
             <a:noFill/>
@@ -11276,7 +11276,7 @@
             <a:avLst/>
           </a:prstGeom>
           <a:solidFill>
-            <a:srgbClr val="EDAB0C"/>
+            <a:srgbClr val="205F61"/>
           </a:solidFill>
           <a:ln>
             <a:noFill/>
@@ -11405,7 +11405,7 @@
             <a:avLst/>
           </a:prstGeom>
           <a:solidFill>
-            <a:srgbClr val="EDAB0C"/>
+            <a:srgbClr val="205F61"/>
           </a:solidFill>
           <a:ln>
             <a:noFill/>
@@ -11534,7 +11534,7 @@
             <a:avLst/>
           </a:prstGeom>
           <a:solidFill>
-            <a:srgbClr val="EDAB0C"/>
+            <a:srgbClr val="205F61"/>
           </a:solidFill>
           <a:ln>
             <a:noFill/>
@@ -11617,7 +11617,7 @@
             <a:avLst/>
           </a:prstGeom>
           <a:solidFill>
-            <a:srgbClr val="EDAB0C"/>
+            <a:srgbClr val="205F61"/>
           </a:solidFill>
           <a:ln>
             <a:noFill/>
@@ -12376,16 +12376,16 @@
             <a:r>
               <a:rPr sz="2400" b="1" i="0">
                 <a:solidFill>
-                  <a:srgbClr val="92268F"/>
+                  <a:srgbClr val="EDAB0C"/>
                 </a:solidFill>
                 <a:latin typeface="Roboto"/>
               </a:rPr>
               <a:t>■  </a:t>
             </a:r>
             <a:r>
-              <a:rPr sz="2400" b="1" i="0">
-                <a:solidFill>
-                  <a:srgbClr val="92268F"/>
+              <a:rPr sz="2400" b="0" i="0">
+                <a:solidFill>
+                  <a:srgbClr val="2A2929"/>
                 </a:solidFill>
                 <a:latin typeface="Roboto"/>
               </a:rPr>
@@ -12734,16 +12734,16 @@
             <a:r>
               <a:rPr sz="2400" b="1" i="0">
                 <a:solidFill>
-                  <a:srgbClr val="92268F"/>
+                  <a:srgbClr val="EDAB0C"/>
                 </a:solidFill>
                 <a:latin typeface="Roboto"/>
               </a:rPr>
               <a:t>■  </a:t>
             </a:r>
             <a:r>
-              <a:rPr sz="2400" b="1" i="0">
-                <a:solidFill>
-                  <a:srgbClr val="92268F"/>
+              <a:rPr sz="2400" b="0" i="0">
+                <a:solidFill>
+                  <a:srgbClr val="2A2929"/>
                 </a:solidFill>
                 <a:latin typeface="Roboto"/>
               </a:rPr>
@@ -13061,16 +13061,16 @@
             <a:r>
               <a:rPr sz="2400" b="1" i="0">
                 <a:solidFill>
-                  <a:srgbClr val="92268F"/>
+                  <a:srgbClr val="EDAB0C"/>
                 </a:solidFill>
                 <a:latin typeface="Roboto"/>
               </a:rPr>
               <a:t>■  </a:t>
             </a:r>
             <a:r>
-              <a:rPr sz="2400" b="1" i="0">
-                <a:solidFill>
-                  <a:srgbClr val="92268F"/>
+              <a:rPr sz="2400" b="0" i="0">
+                <a:solidFill>
+                  <a:srgbClr val="2A2929"/>
                 </a:solidFill>
                 <a:latin typeface="Roboto"/>
               </a:rPr>
@@ -13432,7 +13432,7 @@
               <a:t>■  </a:t>
             </a:r>
             <a:r>
-              <a:rPr sz="1700" b="1" i="0">
+              <a:rPr sz="1700" b="0" i="0">
                 <a:solidFill>
                   <a:srgbClr val="2A2929"/>
                 </a:solidFill>
